--- a/Documentation/PPT/Review 1.pptx
+++ b/Documentation/PPT/Review 1.pptx
@@ -5,23 +5,24 @@
     <p:sldMasterId id="2147483648" r:id="rId1"/>
   </p:sldMasterIdLst>
   <p:notesMasterIdLst>
-    <p:notesMasterId r:id="rId16"/>
+    <p:notesMasterId r:id="rId17"/>
   </p:notesMasterIdLst>
   <p:sldIdLst>
     <p:sldId id="256" r:id="rId2"/>
     <p:sldId id="258" r:id="rId3"/>
-    <p:sldId id="281" r:id="rId4"/>
-    <p:sldId id="271" r:id="rId5"/>
-    <p:sldId id="279" r:id="rId6"/>
-    <p:sldId id="273" r:id="rId7"/>
-    <p:sldId id="274" r:id="rId8"/>
-    <p:sldId id="275" r:id="rId9"/>
-    <p:sldId id="284" r:id="rId10"/>
-    <p:sldId id="285" r:id="rId11"/>
-    <p:sldId id="261" r:id="rId12"/>
-    <p:sldId id="287" r:id="rId13"/>
-    <p:sldId id="286" r:id="rId14"/>
-    <p:sldId id="264" r:id="rId15"/>
+    <p:sldId id="288" r:id="rId4"/>
+    <p:sldId id="281" r:id="rId5"/>
+    <p:sldId id="271" r:id="rId6"/>
+    <p:sldId id="279" r:id="rId7"/>
+    <p:sldId id="273" r:id="rId8"/>
+    <p:sldId id="274" r:id="rId9"/>
+    <p:sldId id="275" r:id="rId10"/>
+    <p:sldId id="284" r:id="rId11"/>
+    <p:sldId id="285" r:id="rId12"/>
+    <p:sldId id="261" r:id="rId13"/>
+    <p:sldId id="287" r:id="rId14"/>
+    <p:sldId id="286" r:id="rId15"/>
+    <p:sldId id="264" r:id="rId16"/>
   </p:sldIdLst>
   <p:sldSz cx="12192000" cy="6858000"/>
   <p:notesSz cx="6858000" cy="9144000"/>
@@ -210,7 +211,7 @@
           <a:p>
             <a:fld id="{830881A4-97E0-4626-BA30-074D23D3B5E2}" type="datetimeFigureOut">
               <a:rPr lang="en-IN" smtClean="0"/>
-              <a:t>22-07-2026</a:t>
+              <a:t>07-10-2026</a:t>
             </a:fld>
             <a:endParaRPr lang="en-IN"/>
           </a:p>
@@ -5306,6 +5307,341 @@
   <p:cSld>
     <p:spTree>
       <p:nvGrpSpPr>
+        <p:cNvPr id="1" name=""/>
+        <p:cNvGrpSpPr/>
+        <p:nvPr/>
+      </p:nvGrpSpPr>
+      <p:grpSpPr>
+        <a:xfrm>
+          <a:off x="0" y="0"/>
+          <a:ext cx="0" cy="0"/>
+          <a:chOff x="0" y="0"/>
+          <a:chExt cx="0" cy="0"/>
+        </a:xfrm>
+      </p:grpSpPr>
+      <p:sp>
+        <p:nvSpPr>
+          <p:cNvPr id="2" name="Footer Placeholder 1"/>
+          <p:cNvSpPr>
+            <a:spLocks noGrp="1"/>
+          </p:cNvSpPr>
+          <p:nvPr>
+            <p:ph type="ftr" sz="quarter" idx="3"/>
+          </p:nvPr>
+        </p:nvSpPr>
+        <p:spPr/>
+        <p:txBody>
+          <a:bodyPr/>
+          <a:lstStyle/>
+          <a:p>
+            <a:r>
+              <a:rPr lang="en-US" dirty="0"/>
+              <a:t>Dept. of CSE | GAT | 2025-26                                                                                                           CSEP23706</a:t>
+            </a:r>
+            <a:endParaRPr lang="en-IN" dirty="0"/>
+          </a:p>
+        </p:txBody>
+      </p:sp>
+      <p:sp>
+        <p:nvSpPr>
+          <p:cNvPr id="3" name="Slide Number Placeholder 2"/>
+          <p:cNvSpPr>
+            <a:spLocks noGrp="1"/>
+          </p:cNvSpPr>
+          <p:nvPr>
+            <p:ph type="sldNum" sz="quarter" idx="4"/>
+          </p:nvPr>
+        </p:nvSpPr>
+        <p:spPr/>
+        <p:txBody>
+          <a:bodyPr/>
+          <a:lstStyle/>
+          <a:p>
+            <a:fld id="{FFAE6D68-FB99-4243-9CC1-93FAA8C005BC}" type="slidenum">
+              <a:rPr lang="en-IN" smtClean="0"/>
+              <a:pPr/>
+              <a:t>10</a:t>
+            </a:fld>
+            <a:endParaRPr lang="en-IN"/>
+          </a:p>
+        </p:txBody>
+      </p:sp>
+      <p:sp>
+        <p:nvSpPr>
+          <p:cNvPr id="4" name="TextBox 3">
+            <a:extLst>
+              <a:ext uri="{FF2B5EF4-FFF2-40B4-BE49-F238E27FC236}">
+                <a16:creationId xmlns:a16="http://schemas.microsoft.com/office/drawing/2014/main" id="{A2D65176-27C0-6A9C-1D22-589841C6C443}"/>
+              </a:ext>
+            </a:extLst>
+          </p:cNvPr>
+          <p:cNvSpPr txBox="1"/>
+          <p:nvPr/>
+        </p:nvSpPr>
+        <p:spPr>
+          <a:xfrm>
+            <a:off x="2470246" y="182880"/>
+            <a:ext cx="7492620" cy="707886"/>
+          </a:xfrm>
+          <a:prstGeom prst="rect">
+            <a:avLst/>
+          </a:prstGeom>
+          <a:noFill/>
+        </p:spPr>
+        <p:txBody>
+          <a:bodyPr wrap="square" rtlCol="0">
+            <a:spAutoFit/>
+          </a:bodyPr>
+          <a:lstStyle/>
+          <a:p>
+            <a:pPr algn="ctr"/>
+            <a:r>
+              <a:rPr lang="en-US" sz="4000" b="1" dirty="0">
+                <a:latin typeface="Cambria" panose="02040503050406030204" pitchFamily="18" charset="0"/>
+                <a:ea typeface="Cambria" panose="02040503050406030204" pitchFamily="18" charset="0"/>
+              </a:rPr>
+              <a:t>Requirements Specification</a:t>
+            </a:r>
+            <a:endParaRPr lang="en-IN" sz="4000" b="1" dirty="0">
+              <a:latin typeface="Cambria" panose="02040503050406030204" pitchFamily="18" charset="0"/>
+              <a:ea typeface="Cambria" panose="02040503050406030204" pitchFamily="18" charset="0"/>
+            </a:endParaRPr>
+          </a:p>
+        </p:txBody>
+      </p:sp>
+      <p:sp>
+        <p:nvSpPr>
+          <p:cNvPr id="5" name="Rectangle 4"/>
+          <p:cNvSpPr/>
+          <p:nvPr/>
+        </p:nvSpPr>
+        <p:spPr>
+          <a:xfrm>
+            <a:off x="678195" y="1227061"/>
+            <a:ext cx="10676741" cy="4339650"/>
+          </a:xfrm>
+          <a:prstGeom prst="rect">
+            <a:avLst/>
+          </a:prstGeom>
+        </p:spPr>
+        <p:txBody>
+          <a:bodyPr wrap="square">
+            <a:spAutoFit/>
+          </a:bodyPr>
+          <a:lstStyle/>
+          <a:p>
+            <a:pPr>
+              <a:lnSpc>
+                <a:spcPct val="150000"/>
+              </a:lnSpc>
+              <a:spcBef>
+                <a:spcPts val="0"/>
+              </a:spcBef>
+            </a:pPr>
+            <a:r>
+              <a:rPr lang="en-US" sz="2400" b="1" dirty="0">
+                <a:latin typeface="Cambria" panose="02040503050406030204" pitchFamily="18" charset="0"/>
+                <a:ea typeface="Cambria" panose="02040503050406030204" pitchFamily="18" charset="0"/>
+              </a:rPr>
+              <a:t>Hardware Requirements</a:t>
+            </a:r>
+          </a:p>
+          <a:p>
+            <a:pPr>
+              <a:lnSpc>
+                <a:spcPct val="150000"/>
+              </a:lnSpc>
+            </a:pPr>
+            <a:r>
+              <a:rPr lang="en-IN" sz="2000" b="1" dirty="0">
+                <a:latin typeface="Cambria" panose="02040503050406030204" pitchFamily="18" charset="0"/>
+                <a:ea typeface="Cambria" panose="02040503050406030204" pitchFamily="18" charset="0"/>
+              </a:rPr>
+              <a:t>Minimum Hardware</a:t>
+            </a:r>
+          </a:p>
+          <a:p>
+            <a:pPr marL="285750" indent="-285750">
+              <a:lnSpc>
+                <a:spcPct val="150000"/>
+              </a:lnSpc>
+              <a:buFont typeface="Arial" panose="020B0604020202020204" pitchFamily="34" charset="0"/>
+              <a:buChar char="•"/>
+            </a:pPr>
+            <a:r>
+              <a:rPr lang="en-IN" dirty="0">
+                <a:latin typeface="Cambria" panose="02040503050406030204" pitchFamily="18" charset="0"/>
+                <a:ea typeface="Cambria" panose="02040503050406030204" pitchFamily="18" charset="0"/>
+              </a:rPr>
+              <a:t>Processor: Intel i5 / AMD </a:t>
+            </a:r>
+            <a:r>
+              <a:rPr lang="en-IN" dirty="0" err="1">
+                <a:latin typeface="Cambria" panose="02040503050406030204" pitchFamily="18" charset="0"/>
+                <a:ea typeface="Cambria" panose="02040503050406030204" pitchFamily="18" charset="0"/>
+              </a:rPr>
+              <a:t>Ryzen</a:t>
+            </a:r>
+            <a:r>
+              <a:rPr lang="en-IN" dirty="0">
+                <a:latin typeface="Cambria" panose="02040503050406030204" pitchFamily="18" charset="0"/>
+                <a:ea typeface="Cambria" panose="02040503050406030204" pitchFamily="18" charset="0"/>
+              </a:rPr>
+              <a:t> 5</a:t>
+            </a:r>
+          </a:p>
+          <a:p>
+            <a:pPr marL="285750" indent="-285750">
+              <a:buFont typeface="Arial" panose="020B0604020202020204" pitchFamily="34" charset="0"/>
+              <a:buChar char="•"/>
+            </a:pPr>
+            <a:r>
+              <a:rPr lang="en-IN" dirty="0">
+                <a:latin typeface="Cambria" panose="02040503050406030204" pitchFamily="18" charset="0"/>
+                <a:ea typeface="Cambria" panose="02040503050406030204" pitchFamily="18" charset="0"/>
+              </a:rPr>
+              <a:t>RAM: 8 GB</a:t>
+            </a:r>
+          </a:p>
+          <a:p>
+            <a:pPr marL="285750" indent="-285750">
+              <a:buFont typeface="Arial" panose="020B0604020202020204" pitchFamily="34" charset="0"/>
+              <a:buChar char="•"/>
+            </a:pPr>
+            <a:r>
+              <a:rPr lang="en-IN" dirty="0">
+                <a:latin typeface="Cambria" panose="02040503050406030204" pitchFamily="18" charset="0"/>
+                <a:ea typeface="Cambria" panose="02040503050406030204" pitchFamily="18" charset="0"/>
+              </a:rPr>
+              <a:t>Storage: 256 GB SSD</a:t>
+            </a:r>
+          </a:p>
+          <a:p>
+            <a:pPr marL="285750" indent="-285750">
+              <a:buFont typeface="Arial" panose="020B0604020202020204" pitchFamily="34" charset="0"/>
+              <a:buChar char="•"/>
+            </a:pPr>
+            <a:r>
+              <a:rPr lang="en-IN" dirty="0">
+                <a:latin typeface="Cambria" panose="02040503050406030204" pitchFamily="18" charset="0"/>
+                <a:ea typeface="Cambria" panose="02040503050406030204" pitchFamily="18" charset="0"/>
+              </a:rPr>
+              <a:t>Internet connection (for GitHub, updates, plugins)</a:t>
+            </a:r>
+          </a:p>
+          <a:p>
+            <a:endParaRPr lang="en-IN" dirty="0">
+              <a:latin typeface="Cambria" panose="02040503050406030204" pitchFamily="18" charset="0"/>
+              <a:ea typeface="Cambria" panose="02040503050406030204" pitchFamily="18" charset="0"/>
+            </a:endParaRPr>
+          </a:p>
+          <a:p>
+            <a:pPr>
+              <a:lnSpc>
+                <a:spcPct val="150000"/>
+              </a:lnSpc>
+            </a:pPr>
+            <a:r>
+              <a:rPr lang="en-IN" sz="2000" b="1" dirty="0">
+                <a:latin typeface="Cambria" panose="02040503050406030204" pitchFamily="18" charset="0"/>
+                <a:ea typeface="Cambria" panose="02040503050406030204" pitchFamily="18" charset="0"/>
+              </a:rPr>
+              <a:t>Recommended Hardware</a:t>
+            </a:r>
+          </a:p>
+          <a:p>
+            <a:pPr marL="285750" indent="-285750">
+              <a:lnSpc>
+                <a:spcPct val="150000"/>
+              </a:lnSpc>
+              <a:buFont typeface="Arial" panose="020B0604020202020204" pitchFamily="34" charset="0"/>
+              <a:buChar char="•"/>
+            </a:pPr>
+            <a:r>
+              <a:rPr lang="en-IN" dirty="0">
+                <a:latin typeface="Cambria" panose="02040503050406030204" pitchFamily="18" charset="0"/>
+                <a:ea typeface="Cambria" panose="02040503050406030204" pitchFamily="18" charset="0"/>
+              </a:rPr>
+              <a:t>Processor: Intel i7 / AMD </a:t>
+            </a:r>
+            <a:r>
+              <a:rPr lang="en-IN" dirty="0" err="1">
+                <a:latin typeface="Cambria" panose="02040503050406030204" pitchFamily="18" charset="0"/>
+                <a:ea typeface="Cambria" panose="02040503050406030204" pitchFamily="18" charset="0"/>
+              </a:rPr>
+              <a:t>Ryzen</a:t>
+            </a:r>
+            <a:r>
+              <a:rPr lang="en-IN" dirty="0">
+                <a:latin typeface="Cambria" panose="02040503050406030204" pitchFamily="18" charset="0"/>
+                <a:ea typeface="Cambria" panose="02040503050406030204" pitchFamily="18" charset="0"/>
+              </a:rPr>
+              <a:t> 7</a:t>
+            </a:r>
+          </a:p>
+          <a:p>
+            <a:pPr marL="285750" indent="-285750">
+              <a:buFont typeface="Arial" panose="020B0604020202020204" pitchFamily="34" charset="0"/>
+              <a:buChar char="•"/>
+            </a:pPr>
+            <a:r>
+              <a:rPr lang="en-IN" dirty="0">
+                <a:latin typeface="Cambria" panose="02040503050406030204" pitchFamily="18" charset="0"/>
+                <a:ea typeface="Cambria" panose="02040503050406030204" pitchFamily="18" charset="0"/>
+              </a:rPr>
+              <a:t>RAM: 16 GB</a:t>
+            </a:r>
+          </a:p>
+          <a:p>
+            <a:pPr marL="285750" indent="-285750">
+              <a:buFont typeface="Arial" panose="020B0604020202020204" pitchFamily="34" charset="0"/>
+              <a:buChar char="•"/>
+            </a:pPr>
+            <a:r>
+              <a:rPr lang="en-IN" dirty="0">
+                <a:latin typeface="Cambria" panose="02040503050406030204" pitchFamily="18" charset="0"/>
+                <a:ea typeface="Cambria" panose="02040503050406030204" pitchFamily="18" charset="0"/>
+              </a:rPr>
+              <a:t>Storage: 512 GB SSD</a:t>
+            </a:r>
+          </a:p>
+          <a:p>
+            <a:pPr marL="285750" indent="-285750">
+              <a:buFont typeface="Arial" panose="020B0604020202020204" pitchFamily="34" charset="0"/>
+              <a:buChar char="•"/>
+            </a:pPr>
+            <a:r>
+              <a:rPr lang="en-IN" dirty="0">
+                <a:latin typeface="Cambria" panose="02040503050406030204" pitchFamily="18" charset="0"/>
+                <a:ea typeface="Cambria" panose="02040503050406030204" pitchFamily="18" charset="0"/>
+              </a:rPr>
+              <a:t>Virtualization support enabled (for Docker &amp; Jenkins)</a:t>
+            </a:r>
+            <a:endParaRPr lang="en-US" sz="2400" dirty="0">
+              <a:latin typeface="Cambria" panose="02040503050406030204" pitchFamily="18" charset="0"/>
+              <a:ea typeface="Cambria" panose="02040503050406030204" pitchFamily="18" charset="0"/>
+            </a:endParaRPr>
+          </a:p>
+        </p:txBody>
+      </p:sp>
+    </p:spTree>
+    <p:extLst>
+      <p:ext uri="{BB962C8B-B14F-4D97-AF65-F5344CB8AC3E}">
+        <p14:creationId xmlns:p14="http://schemas.microsoft.com/office/powerpoint/2010/main" val="3384435853"/>
+      </p:ext>
+    </p:extLst>
+  </p:cSld>
+  <p:clrMapOvr>
+    <a:masterClrMapping/>
+  </p:clrMapOvr>
+</p:sld>
+</file>
+
+<file path=ppt/slides/slide11.xml><?xml version="1.0" encoding="utf-8"?>
+<p:sld xmlns:a="http://schemas.openxmlformats.org/drawingml/2006/main" xmlns:r="http://schemas.openxmlformats.org/officeDocument/2006/relationships" xmlns:p="http://schemas.openxmlformats.org/presentationml/2006/main">
+  <p:cSld>
+    <p:spTree>
+      <p:nvGrpSpPr>
         <p:cNvPr id="1" name="">
           <a:extLst>
             <a:ext uri="{FF2B5EF4-FFF2-40B4-BE49-F238E27FC236}">
@@ -5377,7 +5713,7 @@
             <a:fld id="{FFAE6D68-FB99-4243-9CC1-93FAA8C005BC}" type="slidenum">
               <a:rPr lang="en-IN" smtClean="0"/>
               <a:pPr/>
-              <a:t>10</a:t>
+              <a:t>11</a:t>
             </a:fld>
             <a:endParaRPr lang="en-IN"/>
           </a:p>
@@ -5706,7 +6042,7 @@
 </p:sld>
 </file>
 
-<file path=ppt/slides/slide11.xml><?xml version="1.0" encoding="utf-8"?>
+<file path=ppt/slides/slide12.xml><?xml version="1.0" encoding="utf-8"?>
 <p:sld xmlns:a="http://schemas.openxmlformats.org/drawingml/2006/main" xmlns:r="http://schemas.openxmlformats.org/officeDocument/2006/relationships" xmlns:p="http://schemas.openxmlformats.org/presentationml/2006/main">
   <p:cSld>
     <p:spTree>
@@ -5764,7 +6100,7 @@
             <a:fld id="{FFAE6D68-FB99-4243-9CC1-93FAA8C005BC}" type="slidenum">
               <a:rPr lang="en-IN" smtClean="0"/>
               <a:pPr/>
-              <a:t>11</a:t>
+              <a:t>12</a:t>
             </a:fld>
             <a:endParaRPr lang="en-IN"/>
           </a:p>
@@ -5967,7 +6303,7 @@
 </p:sld>
 </file>
 
-<file path=ppt/slides/slide12.xml><?xml version="1.0" encoding="utf-8"?>
+<file path=ppt/slides/slide13.xml><?xml version="1.0" encoding="utf-8"?>
 <p:sld xmlns:a="http://schemas.openxmlformats.org/drawingml/2006/main" xmlns:r="http://schemas.openxmlformats.org/officeDocument/2006/relationships" xmlns:p="http://schemas.openxmlformats.org/presentationml/2006/main">
   <p:cSld>
     <p:spTree>
@@ -6043,7 +6379,7 @@
             <a:fld id="{FFAE6D68-FB99-4243-9CC1-93FAA8C005BC}" type="slidenum">
               <a:rPr lang="en-IN" smtClean="0"/>
               <a:pPr/>
-              <a:t>12</a:t>
+              <a:t>13</a:t>
             </a:fld>
             <a:endParaRPr lang="en-IN"/>
           </a:p>
@@ -6092,6 +6428,222 @@
           </a:p>
         </p:txBody>
       </p:sp>
+      <p:pic>
+        <p:nvPicPr>
+          <p:cNvPr id="6" name="Picture 5">
+            <a:extLst>
+              <a:ext uri="{FF2B5EF4-FFF2-40B4-BE49-F238E27FC236}">
+                <a16:creationId xmlns:a16="http://schemas.microsoft.com/office/drawing/2014/main" id="{D1880A18-D3AC-5D24-C85C-5CEF049600C4}"/>
+              </a:ext>
+            </a:extLst>
+          </p:cNvPr>
+          <p:cNvPicPr>
+            <a:picLocks noChangeAspect="1"/>
+          </p:cNvPicPr>
+          <p:nvPr/>
+        </p:nvPicPr>
+        <p:blipFill>
+          <a:blip r:embed="rId2">
+            <a:extLst>
+              <a:ext uri="{28A0092B-C50C-407E-A947-70E740481C1C}">
+                <a14:useLocalDpi xmlns:a14="http://schemas.microsoft.com/office/drawing/2010/main" val="0"/>
+              </a:ext>
+            </a:extLst>
+          </a:blip>
+          <a:stretch>
+            <a:fillRect/>
+          </a:stretch>
+        </p:blipFill>
+        <p:spPr>
+          <a:xfrm>
+            <a:off x="1913046" y="1311166"/>
+            <a:ext cx="8122067" cy="4235668"/>
+          </a:xfrm>
+          <a:prstGeom prst="rect">
+            <a:avLst/>
+          </a:prstGeom>
+        </p:spPr>
+      </p:pic>
+      <p:pic>
+        <p:nvPicPr>
+          <p:cNvPr id="12" name="Picture 11">
+            <a:extLst>
+              <a:ext uri="{FF2B5EF4-FFF2-40B4-BE49-F238E27FC236}">
+                <a16:creationId xmlns:a16="http://schemas.microsoft.com/office/drawing/2014/main" id="{B0A89131-61B3-7CAD-D608-C046A85E58EE}"/>
+              </a:ext>
+            </a:extLst>
+          </p:cNvPr>
+          <p:cNvPicPr>
+            <a:picLocks noChangeAspect="1"/>
+          </p:cNvPicPr>
+          <p:nvPr/>
+        </p:nvPicPr>
+        <p:blipFill>
+          <a:blip r:embed="rId3">
+            <a:extLst>
+              <a:ext uri="{28A0092B-C50C-407E-A947-70E740481C1C}">
+                <a14:useLocalDpi xmlns:a14="http://schemas.microsoft.com/office/drawing/2010/main" val="0"/>
+              </a:ext>
+            </a:extLst>
+          </a:blip>
+          <a:stretch>
+            <a:fillRect/>
+          </a:stretch>
+        </p:blipFill>
+        <p:spPr>
+          <a:xfrm>
+            <a:off x="1892725" y="1279415"/>
+            <a:ext cx="8122067" cy="4267419"/>
+          </a:xfrm>
+          <a:prstGeom prst="rect">
+            <a:avLst/>
+          </a:prstGeom>
+        </p:spPr>
+      </p:pic>
+      <p:pic>
+        <p:nvPicPr>
+          <p:cNvPr id="14" name="Picture 13">
+            <a:extLst>
+              <a:ext uri="{FF2B5EF4-FFF2-40B4-BE49-F238E27FC236}">
+                <a16:creationId xmlns:a16="http://schemas.microsoft.com/office/drawing/2014/main" id="{A7104442-DC71-8D28-09AB-688CF016FEE9}"/>
+              </a:ext>
+            </a:extLst>
+          </p:cNvPr>
+          <p:cNvPicPr>
+            <a:picLocks noChangeAspect="1"/>
+          </p:cNvPicPr>
+          <p:nvPr/>
+        </p:nvPicPr>
+        <p:blipFill>
+          <a:blip r:embed="rId4">
+            <a:extLst>
+              <a:ext uri="{28A0092B-C50C-407E-A947-70E740481C1C}">
+                <a14:useLocalDpi xmlns:a14="http://schemas.microsoft.com/office/drawing/2010/main" val="0"/>
+              </a:ext>
+            </a:extLst>
+          </a:blip>
+          <a:stretch>
+            <a:fillRect/>
+          </a:stretch>
+        </p:blipFill>
+        <p:spPr>
+          <a:xfrm>
+            <a:off x="1913046" y="1198880"/>
+            <a:ext cx="8231287" cy="4347954"/>
+          </a:xfrm>
+          <a:prstGeom prst="rect">
+            <a:avLst/>
+          </a:prstGeom>
+        </p:spPr>
+      </p:pic>
+      <p:pic>
+        <p:nvPicPr>
+          <p:cNvPr id="16" name="Picture 15">
+            <a:extLst>
+              <a:ext uri="{FF2B5EF4-FFF2-40B4-BE49-F238E27FC236}">
+                <a16:creationId xmlns:a16="http://schemas.microsoft.com/office/drawing/2014/main" id="{63295DE2-086B-1A86-DBE5-344882F2A853}"/>
+              </a:ext>
+            </a:extLst>
+          </p:cNvPr>
+          <p:cNvPicPr>
+            <a:picLocks noChangeAspect="1"/>
+          </p:cNvPicPr>
+          <p:nvPr/>
+        </p:nvPicPr>
+        <p:blipFill>
+          <a:blip r:embed="rId5">
+            <a:extLst>
+              <a:ext uri="{28A0092B-C50C-407E-A947-70E740481C1C}">
+                <a14:useLocalDpi xmlns:a14="http://schemas.microsoft.com/office/drawing/2010/main" val="0"/>
+              </a:ext>
+            </a:extLst>
+          </a:blip>
+          <a:stretch>
+            <a:fillRect/>
+          </a:stretch>
+        </p:blipFill>
+        <p:spPr>
+          <a:xfrm>
+            <a:off x="1872404" y="1198880"/>
+            <a:ext cx="8284629" cy="4347954"/>
+          </a:xfrm>
+          <a:prstGeom prst="rect">
+            <a:avLst/>
+          </a:prstGeom>
+        </p:spPr>
+      </p:pic>
+      <p:pic>
+        <p:nvPicPr>
+          <p:cNvPr id="18" name="Picture 17">
+            <a:extLst>
+              <a:ext uri="{FF2B5EF4-FFF2-40B4-BE49-F238E27FC236}">
+                <a16:creationId xmlns:a16="http://schemas.microsoft.com/office/drawing/2014/main" id="{162BFE17-659C-1493-E97A-037B1C4D3F27}"/>
+              </a:ext>
+            </a:extLst>
+          </p:cNvPr>
+          <p:cNvPicPr>
+            <a:picLocks noChangeAspect="1"/>
+          </p:cNvPicPr>
+          <p:nvPr/>
+        </p:nvPicPr>
+        <p:blipFill>
+          <a:blip r:embed="rId6">
+            <a:extLst>
+              <a:ext uri="{28A0092B-C50C-407E-A947-70E740481C1C}">
+                <a14:useLocalDpi xmlns:a14="http://schemas.microsoft.com/office/drawing/2010/main" val="0"/>
+              </a:ext>
+            </a:extLst>
+          </a:blip>
+          <a:stretch>
+            <a:fillRect/>
+          </a:stretch>
+        </p:blipFill>
+        <p:spPr>
+          <a:xfrm>
+            <a:off x="1872405" y="1198880"/>
+            <a:ext cx="8265578" cy="4347954"/>
+          </a:xfrm>
+          <a:prstGeom prst="rect">
+            <a:avLst/>
+          </a:prstGeom>
+        </p:spPr>
+      </p:pic>
+      <p:pic>
+        <p:nvPicPr>
+          <p:cNvPr id="20" name="Picture 19">
+            <a:extLst>
+              <a:ext uri="{FF2B5EF4-FFF2-40B4-BE49-F238E27FC236}">
+                <a16:creationId xmlns:a16="http://schemas.microsoft.com/office/drawing/2014/main" id="{19356FFA-9B29-6AA0-4961-50E914FA1D24}"/>
+              </a:ext>
+            </a:extLst>
+          </p:cNvPr>
+          <p:cNvPicPr>
+            <a:picLocks noChangeAspect="1"/>
+          </p:cNvPicPr>
+          <p:nvPr/>
+        </p:nvPicPr>
+        <p:blipFill>
+          <a:blip r:embed="rId7">
+            <a:extLst>
+              <a:ext uri="{28A0092B-C50C-407E-A947-70E740481C1C}">
+                <a14:useLocalDpi xmlns:a14="http://schemas.microsoft.com/office/drawing/2010/main" val="0"/>
+              </a:ext>
+            </a:extLst>
+          </a:blip>
+          <a:stretch>
+            <a:fillRect/>
+          </a:stretch>
+        </p:blipFill>
+        <p:spPr>
+          <a:xfrm>
+            <a:off x="1925746" y="1198880"/>
+            <a:ext cx="8231287" cy="4379705"/>
+          </a:xfrm>
+          <a:prstGeom prst="rect">
+            <a:avLst/>
+          </a:prstGeom>
+        </p:spPr>
+      </p:pic>
     </p:spTree>
     <p:extLst>
       <p:ext uri="{BB962C8B-B14F-4D97-AF65-F5344CB8AC3E}">
@@ -6102,10 +6654,362 @@
   <p:clrMapOvr>
     <a:masterClrMapping/>
   </p:clrMapOvr>
+  <mc:AlternateContent xmlns:mc="http://schemas.openxmlformats.org/markup-compatibility/2006">
+    <mc:Choice xmlns:p159="http://schemas.microsoft.com/office/powerpoint/2015/09/main" Requires="p159">
+      <p:transition xmlns:p14="http://schemas.microsoft.com/office/powerpoint/2010/main" spd="slow" p14:dur="2000">
+        <p159:morph option="byObject"/>
+      </p:transition>
+    </mc:Choice>
+    <mc:Fallback>
+      <p:transition spd="slow">
+        <p:fade/>
+      </p:transition>
+    </mc:Fallback>
+  </mc:AlternateContent>
+  <p:timing>
+    <p:tnLst>
+      <p:par>
+        <p:cTn id="1" dur="indefinite" restart="never" nodeType="tmRoot">
+          <p:childTnLst>
+            <p:seq concurrent="1" nextAc="seek">
+              <p:cTn id="2" dur="indefinite" nodeType="mainSeq">
+                <p:childTnLst>
+                  <p:par>
+                    <p:cTn id="3" fill="hold">
+                      <p:stCondLst>
+                        <p:cond delay="indefinite"/>
+                      </p:stCondLst>
+                      <p:childTnLst>
+                        <p:par>
+                          <p:cTn id="4" fill="hold">
+                            <p:stCondLst>
+                              <p:cond delay="0"/>
+                            </p:stCondLst>
+                            <p:childTnLst>
+                              <p:par>
+                                <p:cTn id="5" presetID="1" presetClass="entr" presetSubtype="0" fill="hold" nodeType="clickEffect">
+                                  <p:stCondLst>
+                                    <p:cond delay="0"/>
+                                  </p:stCondLst>
+                                  <p:childTnLst>
+                                    <p:set>
+                                      <p:cBhvr>
+                                        <p:cTn id="6" dur="1" fill="hold">
+                                          <p:stCondLst>
+                                            <p:cond delay="0"/>
+                                          </p:stCondLst>
+                                        </p:cTn>
+                                        <p:tgtEl>
+                                          <p:spTgt spid="6"/>
+                                        </p:tgtEl>
+                                        <p:attrNameLst>
+                                          <p:attrName>style.visibility</p:attrName>
+                                        </p:attrNameLst>
+                                      </p:cBhvr>
+                                      <p:to>
+                                        <p:strVal val="visible"/>
+                                      </p:to>
+                                    </p:set>
+                                  </p:childTnLst>
+                                </p:cTn>
+                              </p:par>
+                            </p:childTnLst>
+                          </p:cTn>
+                        </p:par>
+                      </p:childTnLst>
+                    </p:cTn>
+                  </p:par>
+                  <p:par>
+                    <p:cTn id="7" fill="hold">
+                      <p:stCondLst>
+                        <p:cond delay="indefinite"/>
+                      </p:stCondLst>
+                      <p:childTnLst>
+                        <p:par>
+                          <p:cTn id="8" fill="hold">
+                            <p:stCondLst>
+                              <p:cond delay="0"/>
+                            </p:stCondLst>
+                            <p:childTnLst>
+                              <p:par>
+                                <p:cTn id="9" presetID="10" presetClass="entr" presetSubtype="0" fill="hold" nodeType="clickEffect">
+                                  <p:stCondLst>
+                                    <p:cond delay="0"/>
+                                  </p:stCondLst>
+                                  <p:childTnLst>
+                                    <p:set>
+                                      <p:cBhvr>
+                                        <p:cTn id="10" dur="1" fill="hold">
+                                          <p:stCondLst>
+                                            <p:cond delay="0"/>
+                                          </p:stCondLst>
+                                        </p:cTn>
+                                        <p:tgtEl>
+                                          <p:spTgt spid="12"/>
+                                        </p:tgtEl>
+                                        <p:attrNameLst>
+                                          <p:attrName>style.visibility</p:attrName>
+                                        </p:attrNameLst>
+                                      </p:cBhvr>
+                                      <p:to>
+                                        <p:strVal val="visible"/>
+                                      </p:to>
+                                    </p:set>
+                                    <p:animEffect transition="in" filter="fade">
+                                      <p:cBhvr>
+                                        <p:cTn id="11" dur="500"/>
+                                        <p:tgtEl>
+                                          <p:spTgt spid="12"/>
+                                        </p:tgtEl>
+                                      </p:cBhvr>
+                                    </p:animEffect>
+                                  </p:childTnLst>
+                                </p:cTn>
+                              </p:par>
+                            </p:childTnLst>
+                          </p:cTn>
+                        </p:par>
+                      </p:childTnLst>
+                    </p:cTn>
+                  </p:par>
+                  <p:par>
+                    <p:cTn id="12" fill="hold">
+                      <p:stCondLst>
+                        <p:cond delay="indefinite"/>
+                      </p:stCondLst>
+                      <p:childTnLst>
+                        <p:par>
+                          <p:cTn id="13" fill="hold">
+                            <p:stCondLst>
+                              <p:cond delay="0"/>
+                            </p:stCondLst>
+                            <p:childTnLst>
+                              <p:par>
+                                <p:cTn id="14" presetID="10" presetClass="entr" presetSubtype="0" fill="hold" nodeType="clickEffect">
+                                  <p:stCondLst>
+                                    <p:cond delay="0"/>
+                                  </p:stCondLst>
+                                  <p:childTnLst>
+                                    <p:set>
+                                      <p:cBhvr>
+                                        <p:cTn id="15" dur="1" fill="hold">
+                                          <p:stCondLst>
+                                            <p:cond delay="0"/>
+                                          </p:stCondLst>
+                                        </p:cTn>
+                                        <p:tgtEl>
+                                          <p:spTgt spid="14"/>
+                                        </p:tgtEl>
+                                        <p:attrNameLst>
+                                          <p:attrName>style.visibility</p:attrName>
+                                        </p:attrNameLst>
+                                      </p:cBhvr>
+                                      <p:to>
+                                        <p:strVal val="visible"/>
+                                      </p:to>
+                                    </p:set>
+                                    <p:animEffect transition="in" filter="fade">
+                                      <p:cBhvr>
+                                        <p:cTn id="16" dur="500"/>
+                                        <p:tgtEl>
+                                          <p:spTgt spid="14"/>
+                                        </p:tgtEl>
+                                      </p:cBhvr>
+                                    </p:animEffect>
+                                  </p:childTnLst>
+                                </p:cTn>
+                              </p:par>
+                            </p:childTnLst>
+                          </p:cTn>
+                        </p:par>
+                      </p:childTnLst>
+                    </p:cTn>
+                  </p:par>
+                  <p:par>
+                    <p:cTn id="17" fill="hold">
+                      <p:stCondLst>
+                        <p:cond delay="indefinite"/>
+                      </p:stCondLst>
+                      <p:childTnLst>
+                        <p:par>
+                          <p:cTn id="18" fill="hold">
+                            <p:stCondLst>
+                              <p:cond delay="0"/>
+                            </p:stCondLst>
+                            <p:childTnLst>
+                              <p:par>
+                                <p:cTn id="19" presetID="10" presetClass="entr" presetSubtype="0" fill="hold" nodeType="clickEffect">
+                                  <p:stCondLst>
+                                    <p:cond delay="0"/>
+                                  </p:stCondLst>
+                                  <p:childTnLst>
+                                    <p:set>
+                                      <p:cBhvr>
+                                        <p:cTn id="20" dur="1" fill="hold">
+                                          <p:stCondLst>
+                                            <p:cond delay="0"/>
+                                          </p:stCondLst>
+                                        </p:cTn>
+                                        <p:tgtEl>
+                                          <p:spTgt spid="16"/>
+                                        </p:tgtEl>
+                                        <p:attrNameLst>
+                                          <p:attrName>style.visibility</p:attrName>
+                                        </p:attrNameLst>
+                                      </p:cBhvr>
+                                      <p:to>
+                                        <p:strVal val="visible"/>
+                                      </p:to>
+                                    </p:set>
+                                    <p:animEffect transition="in" filter="fade">
+                                      <p:cBhvr>
+                                        <p:cTn id="21" dur="500"/>
+                                        <p:tgtEl>
+                                          <p:spTgt spid="16"/>
+                                        </p:tgtEl>
+                                      </p:cBhvr>
+                                    </p:animEffect>
+                                  </p:childTnLst>
+                                </p:cTn>
+                              </p:par>
+                            </p:childTnLst>
+                          </p:cTn>
+                        </p:par>
+                      </p:childTnLst>
+                    </p:cTn>
+                  </p:par>
+                  <p:par>
+                    <p:cTn id="22" fill="hold">
+                      <p:stCondLst>
+                        <p:cond delay="indefinite"/>
+                      </p:stCondLst>
+                      <p:childTnLst>
+                        <p:par>
+                          <p:cTn id="23" fill="hold">
+                            <p:stCondLst>
+                              <p:cond delay="0"/>
+                            </p:stCondLst>
+                            <p:childTnLst>
+                              <p:par>
+                                <p:cTn id="24" presetID="10" presetClass="entr" presetSubtype="0" fill="hold" nodeType="clickEffect">
+                                  <p:stCondLst>
+                                    <p:cond delay="0"/>
+                                  </p:stCondLst>
+                                  <p:childTnLst>
+                                    <p:set>
+                                      <p:cBhvr>
+                                        <p:cTn id="25" dur="1" fill="hold">
+                                          <p:stCondLst>
+                                            <p:cond delay="0"/>
+                                          </p:stCondLst>
+                                        </p:cTn>
+                                        <p:tgtEl>
+                                          <p:spTgt spid="18"/>
+                                        </p:tgtEl>
+                                        <p:attrNameLst>
+                                          <p:attrName>style.visibility</p:attrName>
+                                        </p:attrNameLst>
+                                      </p:cBhvr>
+                                      <p:to>
+                                        <p:strVal val="visible"/>
+                                      </p:to>
+                                    </p:set>
+                                    <p:animEffect transition="in" filter="fade">
+                                      <p:cBhvr>
+                                        <p:cTn id="26" dur="500"/>
+                                        <p:tgtEl>
+                                          <p:spTgt spid="18"/>
+                                        </p:tgtEl>
+                                      </p:cBhvr>
+                                    </p:animEffect>
+                                  </p:childTnLst>
+                                </p:cTn>
+                              </p:par>
+                            </p:childTnLst>
+                          </p:cTn>
+                        </p:par>
+                      </p:childTnLst>
+                    </p:cTn>
+                  </p:par>
+                  <p:par>
+                    <p:cTn id="27" fill="hold">
+                      <p:stCondLst>
+                        <p:cond delay="indefinite"/>
+                      </p:stCondLst>
+                      <p:childTnLst>
+                        <p:par>
+                          <p:cTn id="28" fill="hold">
+                            <p:stCondLst>
+                              <p:cond delay="0"/>
+                            </p:stCondLst>
+                            <p:childTnLst>
+                              <p:par>
+                                <p:cTn id="29" presetID="10" presetClass="entr" presetSubtype="0" fill="hold" nodeType="clickEffect">
+                                  <p:stCondLst>
+                                    <p:cond delay="0"/>
+                                  </p:stCondLst>
+                                  <p:childTnLst>
+                                    <p:set>
+                                      <p:cBhvr>
+                                        <p:cTn id="30" dur="1" fill="hold">
+                                          <p:stCondLst>
+                                            <p:cond delay="0"/>
+                                          </p:stCondLst>
+                                        </p:cTn>
+                                        <p:tgtEl>
+                                          <p:spTgt spid="20"/>
+                                        </p:tgtEl>
+                                        <p:attrNameLst>
+                                          <p:attrName>style.visibility</p:attrName>
+                                        </p:attrNameLst>
+                                      </p:cBhvr>
+                                      <p:to>
+                                        <p:strVal val="visible"/>
+                                      </p:to>
+                                    </p:set>
+                                    <p:animEffect transition="in" filter="fade">
+                                      <p:cBhvr>
+                                        <p:cTn id="31" dur="500"/>
+                                        <p:tgtEl>
+                                          <p:spTgt spid="20"/>
+                                        </p:tgtEl>
+                                      </p:cBhvr>
+                                    </p:animEffect>
+                                  </p:childTnLst>
+                                </p:cTn>
+                              </p:par>
+                            </p:childTnLst>
+                          </p:cTn>
+                        </p:par>
+                      </p:childTnLst>
+                    </p:cTn>
+                  </p:par>
+                </p:childTnLst>
+              </p:cTn>
+              <p:prevCondLst>
+                <p:cond evt="onPrev" delay="0">
+                  <p:tgtEl>
+                    <p:sldTgt/>
+                  </p:tgtEl>
+                </p:cond>
+              </p:prevCondLst>
+              <p:nextCondLst>
+                <p:cond evt="onNext" delay="0">
+                  <p:tgtEl>
+                    <p:sldTgt/>
+                  </p:tgtEl>
+                </p:cond>
+              </p:nextCondLst>
+            </p:seq>
+          </p:childTnLst>
+        </p:cTn>
+      </p:par>
+    </p:tnLst>
+  </p:timing>
 </p:sld>
 </file>
 
-<file path=ppt/slides/slide13.xml><?xml version="1.0" encoding="utf-8"?>
+<file path=ppt/slides/slide14.xml><?xml version="1.0" encoding="utf-8"?>
 <p:sld xmlns:a="http://schemas.openxmlformats.org/drawingml/2006/main" xmlns:r="http://schemas.openxmlformats.org/officeDocument/2006/relationships" xmlns:p="http://schemas.openxmlformats.org/presentationml/2006/main">
   <p:cSld>
     <p:spTree>
@@ -6181,7 +7085,7 @@
             <a:fld id="{FFAE6D68-FB99-4243-9CC1-93FAA8C005BC}" type="slidenum">
               <a:rPr lang="en-IN" smtClean="0"/>
               <a:pPr/>
-              <a:t>13</a:t>
+              <a:t>14</a:t>
             </a:fld>
             <a:endParaRPr lang="en-IN"/>
           </a:p>
@@ -6243,7 +7147,7 @@
 </p:sld>
 </file>
 
-<file path=ppt/slides/slide14.xml><?xml version="1.0" encoding="utf-8"?>
+<file path=ppt/slides/slide15.xml><?xml version="1.0" encoding="utf-8"?>
 <p:sld xmlns:a="http://schemas.openxmlformats.org/drawingml/2006/main" xmlns:r="http://schemas.openxmlformats.org/officeDocument/2006/relationships" xmlns:p="http://schemas.openxmlformats.org/presentationml/2006/main">
   <p:cSld>
     <p:spTree>
@@ -6301,7 +7205,7 @@
             <a:fld id="{FFAE6D68-FB99-4243-9CC1-93FAA8C005BC}" type="slidenum">
               <a:rPr lang="en-IN" smtClean="0"/>
               <a:pPr/>
-              <a:t>14</a:t>
+              <a:t>15</a:t>
             </a:fld>
             <a:endParaRPr lang="en-IN"/>
           </a:p>
@@ -6668,12 +7572,43 @@
                 <a:spcPts val="0"/>
               </a:spcBef>
             </a:pPr>
+            <a:endParaRPr lang="en-US" sz="2200" dirty="0">
+              <a:latin typeface="Cambria" panose="02040503050406030204" pitchFamily="18" charset="0"/>
+              <a:ea typeface="Cambria" panose="02040503050406030204" pitchFamily="18" charset="0"/>
+            </a:endParaRPr>
+          </a:p>
+          <a:p>
+            <a:pPr>
+              <a:lnSpc>
+                <a:spcPct val="150000"/>
+              </a:lnSpc>
+              <a:spcBef>
+                <a:spcPts val="0"/>
+              </a:spcBef>
+            </a:pPr>
             <a:r>
               <a:rPr lang="en-US" sz="2200" dirty="0">
                 <a:latin typeface="Cambria" panose="02040503050406030204" pitchFamily="18" charset="0"/>
                 <a:ea typeface="Cambria" panose="02040503050406030204" pitchFamily="18" charset="0"/>
               </a:rPr>
-              <a:t>System Architecture</a:t>
+              <a:t>Problem Statement</a:t>
+            </a:r>
+          </a:p>
+          <a:p>
+            <a:pPr>
+              <a:lnSpc>
+                <a:spcPct val="150000"/>
+              </a:lnSpc>
+              <a:spcBef>
+                <a:spcPts val="0"/>
+              </a:spcBef>
+            </a:pPr>
+            <a:r>
+              <a:rPr lang="en-US" sz="2200" dirty="0">
+                <a:latin typeface="Cambria" panose="02040503050406030204" pitchFamily="18" charset="0"/>
+                <a:ea typeface="Cambria" panose="02040503050406030204" pitchFamily="18" charset="0"/>
+              </a:rPr>
+              <a:t>System Architecture </a:t>
             </a:r>
           </a:p>
           <a:p>
@@ -6793,57 +7728,10 @@
       </p:grpSpPr>
       <p:sp>
         <p:nvSpPr>
-          <p:cNvPr id="2" name="Footer Placeholder 1"/>
-          <p:cNvSpPr>
-            <a:spLocks noGrp="1"/>
-          </p:cNvSpPr>
-          <p:nvPr>
-            <p:ph type="ftr" sz="quarter" idx="3"/>
-          </p:nvPr>
-        </p:nvSpPr>
-        <p:spPr/>
-        <p:txBody>
-          <a:bodyPr/>
-          <a:lstStyle/>
-          <a:p>
-            <a:r>
-              <a:rPr lang="en-US" dirty="0"/>
-              <a:t>Dept. of CSE | GAT | 2025-26                                                                                                           CSEP23706</a:t>
-            </a:r>
-            <a:endParaRPr lang="en-IN" dirty="0"/>
-          </a:p>
-        </p:txBody>
-      </p:sp>
-      <p:sp>
-        <p:nvSpPr>
-          <p:cNvPr id="3" name="Slide Number Placeholder 2"/>
-          <p:cNvSpPr>
-            <a:spLocks noGrp="1"/>
-          </p:cNvSpPr>
-          <p:nvPr>
-            <p:ph type="sldNum" sz="quarter" idx="4"/>
-          </p:nvPr>
-        </p:nvSpPr>
-        <p:spPr/>
-        <p:txBody>
-          <a:bodyPr/>
-          <a:lstStyle/>
-          <a:p>
-            <a:fld id="{FFAE6D68-FB99-4243-9CC1-93FAA8C005BC}" type="slidenum">
-              <a:rPr lang="en-IN" smtClean="0"/>
-              <a:pPr/>
-              <a:t>3</a:t>
-            </a:fld>
-            <a:endParaRPr lang="en-IN"/>
-          </a:p>
-        </p:txBody>
-      </p:sp>
-      <p:sp>
-        <p:nvSpPr>
-          <p:cNvPr id="4" name="TextBox 3">
+          <p:cNvPr id="5" name="TextBox 4">
             <a:extLst>
               <a:ext uri="{FF2B5EF4-FFF2-40B4-BE49-F238E27FC236}">
-                <a16:creationId xmlns:a16="http://schemas.microsoft.com/office/drawing/2014/main" id="{A2D65176-27C0-6A9C-1D22-589841C6C443}"/>
+                <a16:creationId xmlns:a16="http://schemas.microsoft.com/office/drawing/2014/main" id="{C9EF03E6-B461-C375-3636-27BFC7DBF42B}"/>
               </a:ext>
             </a:extLst>
           </p:cNvPr>
@@ -6852,8 +7740,8 @@
         </p:nvSpPr>
         <p:spPr>
           <a:xfrm>
-            <a:off x="2470246" y="182880"/>
-            <a:ext cx="7492620" cy="707886"/>
+            <a:off x="2717165" y="203200"/>
+            <a:ext cx="6595110" cy="707886"/>
           </a:xfrm>
           <a:prstGeom prst="rect">
             <a:avLst/>
@@ -6868,36 +7756,47 @@
           <a:p>
             <a:pPr algn="ctr"/>
             <a:r>
-              <a:rPr lang="en-US" sz="4000" b="1" dirty="0">
-                <a:latin typeface="Cambria" panose="02040503050406030204" pitchFamily="18" charset="0"/>
-                <a:ea typeface="Cambria" panose="02040503050406030204" pitchFamily="18" charset="0"/>
-              </a:rPr>
-              <a:t>System Architecture</a:t>
-            </a:r>
-            <a:endParaRPr lang="en-IN" sz="4000" b="1" dirty="0">
-              <a:latin typeface="Cambria" panose="02040503050406030204" pitchFamily="18" charset="0"/>
-              <a:ea typeface="Cambria" panose="02040503050406030204" pitchFamily="18" charset="0"/>
+              <a:rPr lang="en-US" sz="4000" b="1" dirty="0"/>
+              <a:t>Problem</a:t>
+            </a:r>
+            <a:r>
+              <a:rPr lang="en-US" b="1" dirty="0"/>
+              <a:t> </a:t>
+            </a:r>
+            <a:r>
+              <a:rPr lang="en-US" sz="4000" b="1" dirty="0"/>
+              <a:t>Statement</a:t>
+            </a:r>
+            <a:endParaRPr lang="en-IN" sz="4000" dirty="0">
+              <a:effectLst/>
             </a:endParaRPr>
           </a:p>
         </p:txBody>
       </p:sp>
       <p:sp>
         <p:nvSpPr>
-          <p:cNvPr id="6" name="Rectangle 5"/>
-          <p:cNvSpPr/>
+          <p:cNvPr id="7" name="TextBox 6">
+            <a:extLst>
+              <a:ext uri="{FF2B5EF4-FFF2-40B4-BE49-F238E27FC236}">
+                <a16:creationId xmlns:a16="http://schemas.microsoft.com/office/drawing/2014/main" id="{DD3044A5-E03F-83C2-0786-F8B5B0986C8E}"/>
+              </a:ext>
+            </a:extLst>
+          </p:cNvPr>
+          <p:cNvSpPr txBox="1"/>
           <p:nvPr/>
         </p:nvSpPr>
         <p:spPr>
           <a:xfrm>
-            <a:off x="464479" y="1353788"/>
-            <a:ext cx="5418161" cy="4190250"/>
+            <a:off x="834014" y="1240790"/>
+            <a:ext cx="11357986" cy="3630546"/>
           </a:xfrm>
           <a:prstGeom prst="rect">
             <a:avLst/>
           </a:prstGeom>
+          <a:noFill/>
         </p:spPr>
         <p:txBody>
-          <a:bodyPr wrap="square">
+          <a:bodyPr wrap="square" rtlCol="0">
             <a:spAutoFit/>
           </a:bodyPr>
           <a:lstStyle/>
@@ -6910,39 +7809,18 @@
               <a:buChar char="•"/>
             </a:pPr>
             <a:r>
-              <a:rPr lang="en-US" sz="2000" dirty="0">
+              <a:rPr lang="en-US" sz="2400" dirty="0">
                 <a:latin typeface="Cambria" panose="02040503050406030204" pitchFamily="18" charset="0"/>
                 <a:ea typeface="Cambria" panose="02040503050406030204" pitchFamily="18" charset="0"/>
               </a:rPr>
-              <a:t>The </a:t>
-            </a:r>
-            <a:r>
-              <a:rPr lang="en-US" sz="2000" dirty="0" err="1">
+              <a:t>Security vulnerabilities are often detected </a:t>
+            </a:r>
+            <a:r>
+              <a:rPr lang="en-US" sz="2400" b="1" dirty="0">
                 <a:latin typeface="Cambria" panose="02040503050406030204" pitchFamily="18" charset="0"/>
                 <a:ea typeface="Cambria" panose="02040503050406030204" pitchFamily="18" charset="0"/>
               </a:rPr>
-              <a:t>DevSecOps</a:t>
-            </a:r>
-            <a:r>
-              <a:rPr lang="en-US" sz="2000" dirty="0">
-                <a:latin typeface="Cambria" panose="02040503050406030204" pitchFamily="18" charset="0"/>
-                <a:ea typeface="Cambria" panose="02040503050406030204" pitchFamily="18" charset="0"/>
-              </a:rPr>
-              <a:t> CI/CD architecture automates the software lifecycle where code pushed to GitHub triggers Jenkins for build, testing, and security scanning using SonarQube and OWASP ZAP/</a:t>
-            </a:r>
-            <a:r>
-              <a:rPr lang="en-US" sz="2000" dirty="0" err="1">
-                <a:latin typeface="Cambria" panose="02040503050406030204" pitchFamily="18" charset="0"/>
-                <a:ea typeface="Cambria" panose="02040503050406030204" pitchFamily="18" charset="0"/>
-              </a:rPr>
-              <a:t>Trivy</a:t>
-            </a:r>
-            <a:r>
-              <a:rPr lang="en-US" sz="2000" dirty="0">
-                <a:latin typeface="Cambria" panose="02040503050406030204" pitchFamily="18" charset="0"/>
-                <a:ea typeface="Cambria" panose="02040503050406030204" pitchFamily="18" charset="0"/>
-              </a:rPr>
-              <a:t>.</a:t>
+              <a:t>after deployment</a:t>
             </a:r>
           </a:p>
           <a:p>
@@ -6954,105 +7832,103 @@
               <a:buChar char="•"/>
             </a:pPr>
             <a:r>
-              <a:rPr lang="en-US" sz="2000" dirty="0">
+              <a:rPr lang="en-US" sz="2200" dirty="0">
                 <a:latin typeface="Cambria" panose="02040503050406030204" pitchFamily="18" charset="0"/>
                 <a:ea typeface="Cambria" panose="02040503050406030204" pitchFamily="18" charset="0"/>
               </a:rPr>
-              <a:t>The application is then containerized with Docker, deployed using Kubernetes on cloud platforms (AWS/Azure), and continuously monitored using Prometheus and Grafana.</a:t>
-            </a:r>
-            <a:endParaRPr lang="en-IN" sz="2000" dirty="0">
+              <a:t>This leads to:</a:t>
+            </a:r>
+          </a:p>
+          <a:p>
+            <a:pPr marL="1257300" lvl="2" indent="-342900" algn="just">
+              <a:lnSpc>
+                <a:spcPct val="150000"/>
+              </a:lnSpc>
+              <a:buFont typeface="Arial" panose="020B0604020202020204" pitchFamily="34" charset="0"/>
+              <a:buChar char="•"/>
+            </a:pPr>
+            <a:r>
+              <a:rPr lang="en-US" sz="2200" dirty="0">
+                <a:latin typeface="Cambria" panose="02040503050406030204" pitchFamily="18" charset="0"/>
+                <a:ea typeface="Cambria" panose="02040503050406030204" pitchFamily="18" charset="0"/>
+              </a:rPr>
+              <a:t>Increased risk of cyberattacks</a:t>
+            </a:r>
+          </a:p>
+          <a:p>
+            <a:pPr marL="1257300" lvl="2" indent="-342900" algn="just">
+              <a:lnSpc>
+                <a:spcPct val="150000"/>
+              </a:lnSpc>
+              <a:buFont typeface="Arial" panose="020B0604020202020204" pitchFamily="34" charset="0"/>
+              <a:buChar char="•"/>
+            </a:pPr>
+            <a:r>
+              <a:rPr lang="en-US" sz="2200" dirty="0">
+                <a:latin typeface="Cambria" panose="02040503050406030204" pitchFamily="18" charset="0"/>
+                <a:ea typeface="Cambria" panose="02040503050406030204" pitchFamily="18" charset="0"/>
+              </a:rPr>
+              <a:t>High remediation and maintenance costs</a:t>
+            </a:r>
+          </a:p>
+          <a:p>
+            <a:pPr marL="1257300" lvl="2" indent="-342900" algn="just">
+              <a:lnSpc>
+                <a:spcPct val="150000"/>
+              </a:lnSpc>
+              <a:buFont typeface="Arial" panose="020B0604020202020204" pitchFamily="34" charset="0"/>
+              <a:buChar char="•"/>
+            </a:pPr>
+            <a:r>
+              <a:rPr lang="en-US" sz="2200" dirty="0">
+                <a:latin typeface="Cambria" panose="02040503050406030204" pitchFamily="18" charset="0"/>
+                <a:ea typeface="Cambria" panose="02040503050406030204" pitchFamily="18" charset="0"/>
+              </a:rPr>
+              <a:t>Delays in software releases</a:t>
+            </a:r>
+          </a:p>
+          <a:p>
+            <a:pPr marL="1257300" lvl="2" indent="-342900" algn="just">
+              <a:lnSpc>
+                <a:spcPct val="150000"/>
+              </a:lnSpc>
+              <a:buFont typeface="Arial" panose="020B0604020202020204" pitchFamily="34" charset="0"/>
+              <a:buChar char="•"/>
+            </a:pPr>
+            <a:r>
+              <a:rPr lang="en-US" sz="2200" dirty="0">
+                <a:latin typeface="Cambria" panose="02040503050406030204" pitchFamily="18" charset="0"/>
+                <a:ea typeface="Cambria" panose="02040503050406030204" pitchFamily="18" charset="0"/>
+              </a:rPr>
+              <a:t>Lack of automated security integration in traditional DevOps pipelines</a:t>
+            </a:r>
+          </a:p>
+          <a:p>
+            <a:pPr marL="342900" indent="-342900" algn="just">
+              <a:lnSpc>
+                <a:spcPct val="150000"/>
+              </a:lnSpc>
+              <a:buFont typeface="Arial" panose="020B0604020202020204" pitchFamily="34" charset="0"/>
+              <a:buChar char="•"/>
+            </a:pPr>
+            <a:r>
+              <a:rPr lang="en-US" sz="2200" dirty="0">
+                <a:latin typeface="Cambria" panose="02040503050406030204" pitchFamily="18" charset="0"/>
+                <a:ea typeface="Cambria" panose="02040503050406030204" pitchFamily="18" charset="0"/>
+              </a:rPr>
+              <a:t>Need for early vulnerability detection in development lifecycle</a:t>
+            </a:r>
+            <a:endParaRPr lang="en-IN" sz="2200" dirty="0">
               <a:latin typeface="Cambria" panose="02040503050406030204" pitchFamily="18" charset="0"/>
               <a:ea typeface="Cambria" panose="02040503050406030204" pitchFamily="18" charset="0"/>
             </a:endParaRPr>
           </a:p>
         </p:txBody>
       </p:sp>
-      <p:sp>
-        <p:nvSpPr>
-          <p:cNvPr id="11" name="TextBox 10"/>
-          <p:cNvSpPr txBox="1"/>
-          <p:nvPr/>
-        </p:nvSpPr>
-        <p:spPr>
-          <a:xfrm>
-            <a:off x="7696200" y="4857540"/>
-            <a:ext cx="3343404" cy="380682"/>
-          </a:xfrm>
-          <a:prstGeom prst="rect">
-            <a:avLst/>
-          </a:prstGeom>
-          <a:noFill/>
-        </p:spPr>
-        <p:txBody>
-          <a:bodyPr wrap="square" rtlCol="0">
-            <a:spAutoFit/>
-          </a:bodyPr>
-          <a:lstStyle/>
-          <a:p>
-            <a:pPr>
-              <a:lnSpc>
-                <a:spcPct val="150000"/>
-              </a:lnSpc>
-            </a:pPr>
-            <a:r>
-              <a:rPr lang="en-US" sz="1400" b="1" dirty="0"/>
-              <a:t>Fig.1 : </a:t>
-            </a:r>
-            <a:r>
-              <a:rPr lang="en-US" sz="1400" b="1" dirty="0" err="1"/>
-              <a:t>DevSecOps</a:t>
-            </a:r>
-            <a:r>
-              <a:rPr lang="en-US" sz="1400" b="1" dirty="0"/>
-              <a:t> CI/CD architecture</a:t>
-            </a:r>
-            <a:endParaRPr lang="en-IN" sz="1400" b="1" dirty="0">
-              <a:latin typeface="Cambria" panose="02040503050406030204" pitchFamily="18" charset="0"/>
-              <a:ea typeface="Cambria" panose="02040503050406030204" pitchFamily="18" charset="0"/>
-            </a:endParaRPr>
-          </a:p>
-        </p:txBody>
-      </p:sp>
-      <p:pic>
-        <p:nvPicPr>
-          <p:cNvPr id="10" name="Picture 9">
-            <a:extLst>
-              <a:ext uri="{FF2B5EF4-FFF2-40B4-BE49-F238E27FC236}">
-                <a16:creationId xmlns:a16="http://schemas.microsoft.com/office/drawing/2014/main" id="{978F5486-85E0-64E3-7C12-07D51C8C02C2}"/>
-              </a:ext>
-            </a:extLst>
-          </p:cNvPr>
-          <p:cNvPicPr>
-            <a:picLocks noChangeAspect="1"/>
-          </p:cNvPicPr>
-          <p:nvPr/>
-        </p:nvPicPr>
-        <p:blipFill>
-          <a:blip r:embed="rId2" cstate="print">
-            <a:extLst>
-              <a:ext uri="{28A0092B-C50C-407E-A947-70E740481C1C}">
-                <a14:useLocalDpi xmlns:a14="http://schemas.microsoft.com/office/drawing/2010/main" val="0"/>
-              </a:ext>
-            </a:extLst>
-          </a:blip>
-          <a:stretch>
-            <a:fillRect/>
-          </a:stretch>
-        </p:blipFill>
-        <p:spPr>
-          <a:xfrm>
-            <a:off x="6096000" y="1353788"/>
-            <a:ext cx="5931477" cy="3421412"/>
-          </a:xfrm>
-          <a:prstGeom prst="rect">
-            <a:avLst/>
-          </a:prstGeom>
-        </p:spPr>
-      </p:pic>
     </p:spTree>
     <p:extLst>
       <p:ext uri="{BB962C8B-B14F-4D97-AF65-F5344CB8AC3E}">
-        <p14:creationId xmlns:p14="http://schemas.microsoft.com/office/powerpoint/2010/main" val="4245285657"/>
+        <p14:creationId xmlns:p14="http://schemas.microsoft.com/office/powerpoint/2010/main" val="537094370"/>
       </p:ext>
     </p:extLst>
   </p:cSld>
@@ -7122,7 +7998,7 @@
               <a:pPr/>
               <a:t>4</a:t>
             </a:fld>
-            <a:endParaRPr lang="en-IN" dirty="0"/>
+            <a:endParaRPr lang="en-IN"/>
           </a:p>
         </p:txBody>
       </p:sp>
@@ -7160,7 +8036,7 @@
                 <a:latin typeface="Cambria" panose="02040503050406030204" pitchFamily="18" charset="0"/>
                 <a:ea typeface="Cambria" panose="02040503050406030204" pitchFamily="18" charset="0"/>
               </a:rPr>
-              <a:t>Data Flow Diagram</a:t>
+              <a:t>System Architecture</a:t>
             </a:r>
             <a:endParaRPr lang="en-IN" sz="4000" b="1" dirty="0">
               <a:latin typeface="Cambria" panose="02040503050406030204" pitchFamily="18" charset="0"/>
@@ -7171,14 +8047,100 @@
       </p:sp>
       <p:sp>
         <p:nvSpPr>
-          <p:cNvPr id="7" name="TextBox 6"/>
+          <p:cNvPr id="6" name="Rectangle 5"/>
+          <p:cNvSpPr/>
+          <p:nvPr/>
+        </p:nvSpPr>
+        <p:spPr>
+          <a:xfrm>
+            <a:off x="464479" y="1353788"/>
+            <a:ext cx="5418161" cy="4190250"/>
+          </a:xfrm>
+          <a:prstGeom prst="rect">
+            <a:avLst/>
+          </a:prstGeom>
+        </p:spPr>
+        <p:txBody>
+          <a:bodyPr wrap="square">
+            <a:spAutoFit/>
+          </a:bodyPr>
+          <a:lstStyle/>
+          <a:p>
+            <a:pPr marL="342900" indent="-342900" algn="just">
+              <a:lnSpc>
+                <a:spcPct val="150000"/>
+              </a:lnSpc>
+              <a:buFont typeface="Arial" panose="020B0604020202020204" pitchFamily="34" charset="0"/>
+              <a:buChar char="•"/>
+            </a:pPr>
+            <a:r>
+              <a:rPr lang="en-US" sz="2000" dirty="0">
+                <a:latin typeface="Cambria" panose="02040503050406030204" pitchFamily="18" charset="0"/>
+                <a:ea typeface="Cambria" panose="02040503050406030204" pitchFamily="18" charset="0"/>
+              </a:rPr>
+              <a:t>The </a:t>
+            </a:r>
+            <a:r>
+              <a:rPr lang="en-US" sz="2000" dirty="0" err="1">
+                <a:latin typeface="Cambria" panose="02040503050406030204" pitchFamily="18" charset="0"/>
+                <a:ea typeface="Cambria" panose="02040503050406030204" pitchFamily="18" charset="0"/>
+              </a:rPr>
+              <a:t>DevSecOps</a:t>
+            </a:r>
+            <a:r>
+              <a:rPr lang="en-US" sz="2000" dirty="0">
+                <a:latin typeface="Cambria" panose="02040503050406030204" pitchFamily="18" charset="0"/>
+                <a:ea typeface="Cambria" panose="02040503050406030204" pitchFamily="18" charset="0"/>
+              </a:rPr>
+              <a:t> CI/CD architecture automates the software lifecycle where code pushed to GitHub triggers Jenkins for build, testing, and security scanning using SonarQube and OWASP ZAP/</a:t>
+            </a:r>
+            <a:r>
+              <a:rPr lang="en-US" sz="2000" dirty="0" err="1">
+                <a:latin typeface="Cambria" panose="02040503050406030204" pitchFamily="18" charset="0"/>
+                <a:ea typeface="Cambria" panose="02040503050406030204" pitchFamily="18" charset="0"/>
+              </a:rPr>
+              <a:t>Trivy</a:t>
+            </a:r>
+            <a:r>
+              <a:rPr lang="en-US" sz="2000" dirty="0">
+                <a:latin typeface="Cambria" panose="02040503050406030204" pitchFamily="18" charset="0"/>
+                <a:ea typeface="Cambria" panose="02040503050406030204" pitchFamily="18" charset="0"/>
+              </a:rPr>
+              <a:t>.</a:t>
+            </a:r>
+          </a:p>
+          <a:p>
+            <a:pPr marL="342900" indent="-342900" algn="just">
+              <a:lnSpc>
+                <a:spcPct val="150000"/>
+              </a:lnSpc>
+              <a:buFont typeface="Arial" panose="020B0604020202020204" pitchFamily="34" charset="0"/>
+              <a:buChar char="•"/>
+            </a:pPr>
+            <a:r>
+              <a:rPr lang="en-US" sz="2000" dirty="0">
+                <a:latin typeface="Cambria" panose="02040503050406030204" pitchFamily="18" charset="0"/>
+                <a:ea typeface="Cambria" panose="02040503050406030204" pitchFamily="18" charset="0"/>
+              </a:rPr>
+              <a:t>The application is then containerized with Docker, deployed using Kubernetes on cloud platforms (AWS/Azure), and continuously monitored using Prometheus and Grafana.</a:t>
+            </a:r>
+            <a:endParaRPr lang="en-IN" sz="2000" dirty="0">
+              <a:latin typeface="Cambria" panose="02040503050406030204" pitchFamily="18" charset="0"/>
+              <a:ea typeface="Cambria" panose="02040503050406030204" pitchFamily="18" charset="0"/>
+            </a:endParaRPr>
+          </a:p>
+        </p:txBody>
+      </p:sp>
+      <p:sp>
+        <p:nvSpPr>
+          <p:cNvPr id="11" name="TextBox 10"/>
           <p:cNvSpPr txBox="1"/>
           <p:nvPr/>
         </p:nvSpPr>
         <p:spPr>
           <a:xfrm>
-            <a:off x="586853" y="1337480"/>
-            <a:ext cx="10563368" cy="1938992"/>
+            <a:off x="7696200" y="4857540"/>
+            <a:ext cx="3343404" cy="380682"/>
           </a:xfrm>
           <a:prstGeom prst="rect">
             <a:avLst/>
@@ -7191,39 +8153,70 @@
           </a:bodyPr>
           <a:lstStyle/>
           <a:p>
-            <a:pPr algn="just">
+            <a:pPr>
               <a:lnSpc>
                 <a:spcPct val="150000"/>
               </a:lnSpc>
             </a:pPr>
             <a:r>
-              <a:rPr lang="en-US" sz="2000" b="1" dirty="0">
-                <a:latin typeface="Cambria" panose="02040503050406030204" pitchFamily="18" charset="0"/>
-                <a:ea typeface="Cambria" panose="02040503050406030204" pitchFamily="18" charset="0"/>
-              </a:rPr>
-              <a:t>Definition:</a:t>
-            </a:r>
-          </a:p>
-          <a:p>
-            <a:pPr algn="just">
-              <a:lnSpc>
-                <a:spcPct val="150000"/>
-              </a:lnSpc>
-            </a:pPr>
-            <a:r>
-              <a:rPr lang="en-US" sz="2000" dirty="0">
-                <a:latin typeface="Cambria" panose="02040503050406030204" pitchFamily="18" charset="0"/>
-                <a:ea typeface="Cambria" panose="02040503050406030204" pitchFamily="18" charset="0"/>
-              </a:rPr>
-              <a:t>A Data Flow Diagram is a graphical representation that shows how data moves through a system. It illustrates the inputs, outputs, processes, and data stores within a system without showing control flow or timing.</a:t>
-            </a:r>
-          </a:p>
-        </p:txBody>
-      </p:sp>
+              <a:rPr lang="en-US" sz="1400" b="1" dirty="0"/>
+              <a:t>Fig.1 : </a:t>
+            </a:r>
+            <a:r>
+              <a:rPr lang="en-US" sz="1400" b="1" dirty="0" err="1"/>
+              <a:t>DevSecOps</a:t>
+            </a:r>
+            <a:r>
+              <a:rPr lang="en-US" sz="1400" b="1" dirty="0"/>
+              <a:t> CI/CD architecture</a:t>
+            </a:r>
+            <a:endParaRPr lang="en-IN" sz="1400" b="1" dirty="0">
+              <a:latin typeface="Cambria" panose="02040503050406030204" pitchFamily="18" charset="0"/>
+              <a:ea typeface="Cambria" panose="02040503050406030204" pitchFamily="18" charset="0"/>
+            </a:endParaRPr>
+          </a:p>
+        </p:txBody>
+      </p:sp>
+      <p:pic>
+        <p:nvPicPr>
+          <p:cNvPr id="7" name="Picture 6">
+            <a:extLst>
+              <a:ext uri="{FF2B5EF4-FFF2-40B4-BE49-F238E27FC236}">
+                <a16:creationId xmlns:a16="http://schemas.microsoft.com/office/drawing/2014/main" id="{9B74580A-1233-BD96-FF09-6F09F6FD4D57}"/>
+              </a:ext>
+            </a:extLst>
+          </p:cNvPr>
+          <p:cNvPicPr>
+            <a:picLocks noChangeAspect="1"/>
+          </p:cNvPicPr>
+          <p:nvPr/>
+        </p:nvPicPr>
+        <p:blipFill>
+          <a:blip r:embed="rId2">
+            <a:extLst>
+              <a:ext uri="{28A0092B-C50C-407E-A947-70E740481C1C}">
+                <a14:useLocalDpi xmlns:a14="http://schemas.microsoft.com/office/drawing/2010/main" val="0"/>
+              </a:ext>
+            </a:extLst>
+          </a:blip>
+          <a:stretch>
+            <a:fillRect/>
+          </a:stretch>
+        </p:blipFill>
+        <p:spPr>
+          <a:xfrm>
+            <a:off x="6216556" y="1353788"/>
+            <a:ext cx="5831840" cy="3206522"/>
+          </a:xfrm>
+          <a:prstGeom prst="rect">
+            <a:avLst/>
+          </a:prstGeom>
+        </p:spPr>
+      </p:pic>
     </p:spTree>
     <p:extLst>
       <p:ext uri="{BB962C8B-B14F-4D97-AF65-F5344CB8AC3E}">
-        <p14:creationId xmlns:p14="http://schemas.microsoft.com/office/powerpoint/2010/main" val="1527851385"/>
+        <p14:creationId xmlns:p14="http://schemas.microsoft.com/office/powerpoint/2010/main" val="4245285657"/>
       </p:ext>
     </p:extLst>
   </p:cSld>
@@ -7293,7 +8286,7 @@
               <a:pPr/>
               <a:t>5</a:t>
             </a:fld>
-            <a:endParaRPr lang="en-IN"/>
+            <a:endParaRPr lang="en-IN" dirty="0"/>
           </a:p>
         </p:txBody>
       </p:sp>
@@ -7348,8 +8341,8 @@
         </p:nvSpPr>
         <p:spPr>
           <a:xfrm>
-            <a:off x="380999" y="1064525"/>
-            <a:ext cx="11096767" cy="5170646"/>
+            <a:off x="586853" y="1337480"/>
+            <a:ext cx="10563368" cy="1938992"/>
           </a:xfrm>
           <a:prstGeom prst="rect">
             <a:avLst/>
@@ -7372,7 +8365,7 @@
                 <a:latin typeface="Cambria" panose="02040503050406030204" pitchFamily="18" charset="0"/>
                 <a:ea typeface="Cambria" panose="02040503050406030204" pitchFamily="18" charset="0"/>
               </a:rPr>
-              <a:t>DFD Level 0 — Context Diagram</a:t>
+              <a:t>Definition:</a:t>
             </a:r>
           </a:p>
           <a:p>
@@ -7386,85 +8379,7 @@
                 <a:latin typeface="Cambria" panose="02040503050406030204" pitchFamily="18" charset="0"/>
                 <a:ea typeface="Cambria" panose="02040503050406030204" pitchFamily="18" charset="0"/>
               </a:rPr>
-              <a:t>The topmost level of DFD that represents the entire system as a single process. It shows how the system interacts with the outside world.</a:t>
-            </a:r>
-          </a:p>
-          <a:p>
-            <a:pPr algn="just">
-              <a:lnSpc>
-                <a:spcPct val="150000"/>
-              </a:lnSpc>
-            </a:pPr>
-            <a:endParaRPr lang="en-US" sz="2000" dirty="0">
-              <a:latin typeface="Cambria" panose="02040503050406030204" pitchFamily="18" charset="0"/>
-              <a:ea typeface="Cambria" panose="02040503050406030204" pitchFamily="18" charset="0"/>
-            </a:endParaRPr>
-          </a:p>
-          <a:p>
-            <a:pPr algn="just">
-              <a:lnSpc>
-                <a:spcPct val="150000"/>
-              </a:lnSpc>
-            </a:pPr>
-            <a:r>
-              <a:rPr lang="en-US" sz="2000" b="1" dirty="0">
-                <a:latin typeface="Cambria" panose="02040503050406030204" pitchFamily="18" charset="0"/>
-                <a:ea typeface="Cambria" panose="02040503050406030204" pitchFamily="18" charset="0"/>
-              </a:rPr>
-              <a:t>DFD Level 1</a:t>
-            </a:r>
-          </a:p>
-          <a:p>
-            <a:pPr algn="just">
-              <a:lnSpc>
-                <a:spcPct val="150000"/>
-              </a:lnSpc>
-            </a:pPr>
-            <a:r>
-              <a:rPr lang="en-US" sz="2000" dirty="0">
-                <a:latin typeface="Cambria" panose="02040503050406030204" pitchFamily="18" charset="0"/>
-                <a:ea typeface="Cambria" panose="02040503050406030204" pitchFamily="18" charset="0"/>
-              </a:rPr>
-              <a:t>Level 1 breaks the single process of Level 0 into major sub-processes (main functions of the system). Data stores are introduced at this level.</a:t>
-            </a:r>
-          </a:p>
-          <a:p>
-            <a:pPr algn="just">
-              <a:lnSpc>
-                <a:spcPct val="150000"/>
-              </a:lnSpc>
-            </a:pPr>
-            <a:endParaRPr lang="en-US" sz="2000" dirty="0">
-              <a:latin typeface="Cambria" panose="02040503050406030204" pitchFamily="18" charset="0"/>
-              <a:ea typeface="Cambria" panose="02040503050406030204" pitchFamily="18" charset="0"/>
-            </a:endParaRPr>
-          </a:p>
-          <a:p>
-            <a:pPr algn="just">
-              <a:lnSpc>
-                <a:spcPct val="150000"/>
-              </a:lnSpc>
-            </a:pPr>
-            <a:r>
-              <a:rPr lang="en-US" sz="2000" b="1" dirty="0">
-                <a:latin typeface="Cambria" panose="02040503050406030204" pitchFamily="18" charset="0"/>
-                <a:ea typeface="Cambria" panose="02040503050406030204" pitchFamily="18" charset="0"/>
-              </a:rPr>
-              <a:t>DFD Level 2</a:t>
-            </a:r>
-          </a:p>
-          <a:p>
-            <a:pPr algn="just">
-              <a:lnSpc>
-                <a:spcPct val="150000"/>
-              </a:lnSpc>
-            </a:pPr>
-            <a:r>
-              <a:rPr lang="en-US" sz="2000" dirty="0">
-                <a:latin typeface="Cambria" panose="02040503050406030204" pitchFamily="18" charset="0"/>
-                <a:ea typeface="Cambria" panose="02040503050406030204" pitchFamily="18" charset="0"/>
-              </a:rPr>
-              <a:t>Level 2 further decomposes each Level 1 process into detailed sub-processes. Each major process from Level 1 gets its own Level 2 DFD.</a:t>
+              <a:t>A Data Flow Diagram is a graphical representation that shows how data moves through a system. It illustrates the inputs, outputs, processes, and data stores within a system without showing control flow or timing.</a:t>
             </a:r>
           </a:p>
         </p:txBody>
@@ -7472,7 +8387,7 @@
     </p:spTree>
     <p:extLst>
       <p:ext uri="{BB962C8B-B14F-4D97-AF65-F5344CB8AC3E}">
-        <p14:creationId xmlns:p14="http://schemas.microsoft.com/office/powerpoint/2010/main" val="3624662726"/>
+        <p14:creationId xmlns:p14="http://schemas.microsoft.com/office/powerpoint/2010/main" val="1527851385"/>
       </p:ext>
     </p:extLst>
   </p:cSld>
@@ -7541,6 +8456,255 @@
               <a:rPr lang="en-IN" smtClean="0"/>
               <a:pPr/>
               <a:t>6</a:t>
+            </a:fld>
+            <a:endParaRPr lang="en-IN"/>
+          </a:p>
+        </p:txBody>
+      </p:sp>
+      <p:sp>
+        <p:nvSpPr>
+          <p:cNvPr id="4" name="TextBox 3">
+            <a:extLst>
+              <a:ext uri="{FF2B5EF4-FFF2-40B4-BE49-F238E27FC236}">
+                <a16:creationId xmlns:a16="http://schemas.microsoft.com/office/drawing/2014/main" id="{A2D65176-27C0-6A9C-1D22-589841C6C443}"/>
+              </a:ext>
+            </a:extLst>
+          </p:cNvPr>
+          <p:cNvSpPr txBox="1"/>
+          <p:nvPr/>
+        </p:nvSpPr>
+        <p:spPr>
+          <a:xfrm>
+            <a:off x="2470246" y="182880"/>
+            <a:ext cx="7492620" cy="707886"/>
+          </a:xfrm>
+          <a:prstGeom prst="rect">
+            <a:avLst/>
+          </a:prstGeom>
+          <a:noFill/>
+        </p:spPr>
+        <p:txBody>
+          <a:bodyPr wrap="square" rtlCol="0">
+            <a:spAutoFit/>
+          </a:bodyPr>
+          <a:lstStyle/>
+          <a:p>
+            <a:pPr algn="ctr"/>
+            <a:r>
+              <a:rPr lang="en-US" sz="4000" b="1" dirty="0">
+                <a:latin typeface="Cambria" panose="02040503050406030204" pitchFamily="18" charset="0"/>
+                <a:ea typeface="Cambria" panose="02040503050406030204" pitchFamily="18" charset="0"/>
+              </a:rPr>
+              <a:t>Data Flow Diagram</a:t>
+            </a:r>
+            <a:endParaRPr lang="en-IN" sz="4000" b="1" dirty="0">
+              <a:latin typeface="Cambria" panose="02040503050406030204" pitchFamily="18" charset="0"/>
+              <a:ea typeface="Cambria" panose="02040503050406030204" pitchFamily="18" charset="0"/>
+            </a:endParaRPr>
+          </a:p>
+        </p:txBody>
+      </p:sp>
+      <p:sp>
+        <p:nvSpPr>
+          <p:cNvPr id="7" name="TextBox 6"/>
+          <p:cNvSpPr txBox="1"/>
+          <p:nvPr/>
+        </p:nvSpPr>
+        <p:spPr>
+          <a:xfrm>
+            <a:off x="380999" y="1064525"/>
+            <a:ext cx="11096767" cy="5170646"/>
+          </a:xfrm>
+          <a:prstGeom prst="rect">
+            <a:avLst/>
+          </a:prstGeom>
+          <a:noFill/>
+        </p:spPr>
+        <p:txBody>
+          <a:bodyPr wrap="square" rtlCol="0">
+            <a:spAutoFit/>
+          </a:bodyPr>
+          <a:lstStyle/>
+          <a:p>
+            <a:pPr algn="just">
+              <a:lnSpc>
+                <a:spcPct val="150000"/>
+              </a:lnSpc>
+            </a:pPr>
+            <a:r>
+              <a:rPr lang="en-US" sz="2000" b="1" dirty="0">
+                <a:latin typeface="Cambria" panose="02040503050406030204" pitchFamily="18" charset="0"/>
+                <a:ea typeface="Cambria" panose="02040503050406030204" pitchFamily="18" charset="0"/>
+              </a:rPr>
+              <a:t>DFD Level 0 — Context Diagram</a:t>
+            </a:r>
+          </a:p>
+          <a:p>
+            <a:pPr algn="just">
+              <a:lnSpc>
+                <a:spcPct val="150000"/>
+              </a:lnSpc>
+            </a:pPr>
+            <a:r>
+              <a:rPr lang="en-US" sz="2000" dirty="0">
+                <a:latin typeface="Cambria" panose="02040503050406030204" pitchFamily="18" charset="0"/>
+                <a:ea typeface="Cambria" panose="02040503050406030204" pitchFamily="18" charset="0"/>
+              </a:rPr>
+              <a:t>The topmost level of DFD that represents the entire system as a single process. It shows how the system interacts with the outside world.</a:t>
+            </a:r>
+          </a:p>
+          <a:p>
+            <a:pPr algn="just">
+              <a:lnSpc>
+                <a:spcPct val="150000"/>
+              </a:lnSpc>
+            </a:pPr>
+            <a:endParaRPr lang="en-US" sz="2000" dirty="0">
+              <a:latin typeface="Cambria" panose="02040503050406030204" pitchFamily="18" charset="0"/>
+              <a:ea typeface="Cambria" panose="02040503050406030204" pitchFamily="18" charset="0"/>
+            </a:endParaRPr>
+          </a:p>
+          <a:p>
+            <a:pPr algn="just">
+              <a:lnSpc>
+                <a:spcPct val="150000"/>
+              </a:lnSpc>
+            </a:pPr>
+            <a:r>
+              <a:rPr lang="en-US" sz="2000" b="1" dirty="0">
+                <a:latin typeface="Cambria" panose="02040503050406030204" pitchFamily="18" charset="0"/>
+                <a:ea typeface="Cambria" panose="02040503050406030204" pitchFamily="18" charset="0"/>
+              </a:rPr>
+              <a:t>DFD Level 1</a:t>
+            </a:r>
+          </a:p>
+          <a:p>
+            <a:pPr algn="just">
+              <a:lnSpc>
+                <a:spcPct val="150000"/>
+              </a:lnSpc>
+            </a:pPr>
+            <a:r>
+              <a:rPr lang="en-US" sz="2000" dirty="0">
+                <a:latin typeface="Cambria" panose="02040503050406030204" pitchFamily="18" charset="0"/>
+                <a:ea typeface="Cambria" panose="02040503050406030204" pitchFamily="18" charset="0"/>
+              </a:rPr>
+              <a:t>Level 1 breaks the single process of Level 0 into major sub-processes (main functions of the system). Data stores are introduced at this level.</a:t>
+            </a:r>
+          </a:p>
+          <a:p>
+            <a:pPr algn="just">
+              <a:lnSpc>
+                <a:spcPct val="150000"/>
+              </a:lnSpc>
+            </a:pPr>
+            <a:endParaRPr lang="en-US" sz="2000" dirty="0">
+              <a:latin typeface="Cambria" panose="02040503050406030204" pitchFamily="18" charset="0"/>
+              <a:ea typeface="Cambria" panose="02040503050406030204" pitchFamily="18" charset="0"/>
+            </a:endParaRPr>
+          </a:p>
+          <a:p>
+            <a:pPr algn="just">
+              <a:lnSpc>
+                <a:spcPct val="150000"/>
+              </a:lnSpc>
+            </a:pPr>
+            <a:r>
+              <a:rPr lang="en-US" sz="2000" b="1" dirty="0">
+                <a:latin typeface="Cambria" panose="02040503050406030204" pitchFamily="18" charset="0"/>
+                <a:ea typeface="Cambria" panose="02040503050406030204" pitchFamily="18" charset="0"/>
+              </a:rPr>
+              <a:t>DFD Level 2</a:t>
+            </a:r>
+          </a:p>
+          <a:p>
+            <a:pPr algn="just">
+              <a:lnSpc>
+                <a:spcPct val="150000"/>
+              </a:lnSpc>
+            </a:pPr>
+            <a:r>
+              <a:rPr lang="en-US" sz="2000" dirty="0">
+                <a:latin typeface="Cambria" panose="02040503050406030204" pitchFamily="18" charset="0"/>
+                <a:ea typeface="Cambria" panose="02040503050406030204" pitchFamily="18" charset="0"/>
+              </a:rPr>
+              <a:t>Level 2 further decomposes each Level 1 process into detailed sub-processes. Each major process from Level 1 gets its own Level 2 DFD.</a:t>
+            </a:r>
+          </a:p>
+        </p:txBody>
+      </p:sp>
+    </p:spTree>
+    <p:extLst>
+      <p:ext uri="{BB962C8B-B14F-4D97-AF65-F5344CB8AC3E}">
+        <p14:creationId xmlns:p14="http://schemas.microsoft.com/office/powerpoint/2010/main" val="3624662726"/>
+      </p:ext>
+    </p:extLst>
+  </p:cSld>
+  <p:clrMapOvr>
+    <a:masterClrMapping/>
+  </p:clrMapOvr>
+</p:sld>
+</file>
+
+<file path=ppt/slides/slide7.xml><?xml version="1.0" encoding="utf-8"?>
+<p:sld xmlns:a="http://schemas.openxmlformats.org/drawingml/2006/main" xmlns:r="http://schemas.openxmlformats.org/officeDocument/2006/relationships" xmlns:p="http://schemas.openxmlformats.org/presentationml/2006/main">
+  <p:cSld>
+    <p:spTree>
+      <p:nvGrpSpPr>
+        <p:cNvPr id="1" name=""/>
+        <p:cNvGrpSpPr/>
+        <p:nvPr/>
+      </p:nvGrpSpPr>
+      <p:grpSpPr>
+        <a:xfrm>
+          <a:off x="0" y="0"/>
+          <a:ext cx="0" cy="0"/>
+          <a:chOff x="0" y="0"/>
+          <a:chExt cx="0" cy="0"/>
+        </a:xfrm>
+      </p:grpSpPr>
+      <p:sp>
+        <p:nvSpPr>
+          <p:cNvPr id="2" name="Footer Placeholder 1"/>
+          <p:cNvSpPr>
+            <a:spLocks noGrp="1"/>
+          </p:cNvSpPr>
+          <p:nvPr>
+            <p:ph type="ftr" sz="quarter" idx="3"/>
+          </p:nvPr>
+        </p:nvSpPr>
+        <p:spPr/>
+        <p:txBody>
+          <a:bodyPr/>
+          <a:lstStyle/>
+          <a:p>
+            <a:r>
+              <a:rPr lang="en-US" dirty="0"/>
+              <a:t>Dept. of CSE | GAT | 2025-26                                                                                                           CSEP23706</a:t>
+            </a:r>
+            <a:endParaRPr lang="en-IN" dirty="0"/>
+          </a:p>
+        </p:txBody>
+      </p:sp>
+      <p:sp>
+        <p:nvSpPr>
+          <p:cNvPr id="3" name="Slide Number Placeholder 2"/>
+          <p:cNvSpPr>
+            <a:spLocks noGrp="1"/>
+          </p:cNvSpPr>
+          <p:nvPr>
+            <p:ph type="sldNum" sz="quarter" idx="4"/>
+          </p:nvPr>
+        </p:nvSpPr>
+        <p:spPr/>
+        <p:txBody>
+          <a:bodyPr/>
+          <a:lstStyle/>
+          <a:p>
+            <a:fld id="{FFAE6D68-FB99-4243-9CC1-93FAA8C005BC}" type="slidenum">
+              <a:rPr lang="en-IN" smtClean="0"/>
+              <a:pPr/>
+              <a:t>7</a:t>
             </a:fld>
             <a:endParaRPr lang="en-IN"/>
           </a:p>
@@ -7765,7 +8929,7 @@
 </p:sld>
 </file>
 
-<file path=ppt/slides/slide7.xml><?xml version="1.0" encoding="utf-8"?>
+<file path=ppt/slides/slide8.xml><?xml version="1.0" encoding="utf-8"?>
 <p:sld xmlns:a="http://schemas.openxmlformats.org/drawingml/2006/main" xmlns:r="http://schemas.openxmlformats.org/officeDocument/2006/relationships" xmlns:p="http://schemas.openxmlformats.org/presentationml/2006/main">
   <p:cSld>
     <p:spTree>
@@ -7823,7 +8987,7 @@
             <a:fld id="{FFAE6D68-FB99-4243-9CC1-93FAA8C005BC}" type="slidenum">
               <a:rPr lang="en-IN" smtClean="0"/>
               <a:pPr/>
-              <a:t>7</a:t>
+              <a:t>8</a:t>
             </a:fld>
             <a:endParaRPr lang="en-IN"/>
           </a:p>
@@ -8062,7 +9226,7 @@
 </p:sld>
 </file>
 
-<file path=ppt/slides/slide8.xml><?xml version="1.0" encoding="utf-8"?>
+<file path=ppt/slides/slide9.xml><?xml version="1.0" encoding="utf-8"?>
 <p:sld xmlns:a="http://schemas.openxmlformats.org/drawingml/2006/main" xmlns:r="http://schemas.openxmlformats.org/officeDocument/2006/relationships" xmlns:p="http://schemas.openxmlformats.org/presentationml/2006/main">
   <p:cSld>
     <p:spTree>
@@ -8120,7 +9284,7 @@
             <a:fld id="{FFAE6D68-FB99-4243-9CC1-93FAA8C005BC}" type="slidenum">
               <a:rPr lang="en-IN" smtClean="0"/>
               <a:pPr/>
-              <a:t>8</a:t>
+              <a:t>9</a:t>
             </a:fld>
             <a:endParaRPr lang="en-IN"/>
           </a:p>
@@ -8336,341 +9500,6 @@
     <p:extLst>
       <p:ext uri="{BB962C8B-B14F-4D97-AF65-F5344CB8AC3E}">
         <p14:creationId xmlns:p14="http://schemas.microsoft.com/office/powerpoint/2010/main" val="2156836029"/>
-      </p:ext>
-    </p:extLst>
-  </p:cSld>
-  <p:clrMapOvr>
-    <a:masterClrMapping/>
-  </p:clrMapOvr>
-</p:sld>
-</file>
-
-<file path=ppt/slides/slide9.xml><?xml version="1.0" encoding="utf-8"?>
-<p:sld xmlns:a="http://schemas.openxmlformats.org/drawingml/2006/main" xmlns:r="http://schemas.openxmlformats.org/officeDocument/2006/relationships" xmlns:p="http://schemas.openxmlformats.org/presentationml/2006/main">
-  <p:cSld>
-    <p:spTree>
-      <p:nvGrpSpPr>
-        <p:cNvPr id="1" name=""/>
-        <p:cNvGrpSpPr/>
-        <p:nvPr/>
-      </p:nvGrpSpPr>
-      <p:grpSpPr>
-        <a:xfrm>
-          <a:off x="0" y="0"/>
-          <a:ext cx="0" cy="0"/>
-          <a:chOff x="0" y="0"/>
-          <a:chExt cx="0" cy="0"/>
-        </a:xfrm>
-      </p:grpSpPr>
-      <p:sp>
-        <p:nvSpPr>
-          <p:cNvPr id="2" name="Footer Placeholder 1"/>
-          <p:cNvSpPr>
-            <a:spLocks noGrp="1"/>
-          </p:cNvSpPr>
-          <p:nvPr>
-            <p:ph type="ftr" sz="quarter" idx="3"/>
-          </p:nvPr>
-        </p:nvSpPr>
-        <p:spPr/>
-        <p:txBody>
-          <a:bodyPr/>
-          <a:lstStyle/>
-          <a:p>
-            <a:r>
-              <a:rPr lang="en-US" dirty="0"/>
-              <a:t>Dept. of CSE | GAT | 2025-26                                                                                                           CSEP23706</a:t>
-            </a:r>
-            <a:endParaRPr lang="en-IN" dirty="0"/>
-          </a:p>
-        </p:txBody>
-      </p:sp>
-      <p:sp>
-        <p:nvSpPr>
-          <p:cNvPr id="3" name="Slide Number Placeholder 2"/>
-          <p:cNvSpPr>
-            <a:spLocks noGrp="1"/>
-          </p:cNvSpPr>
-          <p:nvPr>
-            <p:ph type="sldNum" sz="quarter" idx="4"/>
-          </p:nvPr>
-        </p:nvSpPr>
-        <p:spPr/>
-        <p:txBody>
-          <a:bodyPr/>
-          <a:lstStyle/>
-          <a:p>
-            <a:fld id="{FFAE6D68-FB99-4243-9CC1-93FAA8C005BC}" type="slidenum">
-              <a:rPr lang="en-IN" smtClean="0"/>
-              <a:pPr/>
-              <a:t>9</a:t>
-            </a:fld>
-            <a:endParaRPr lang="en-IN"/>
-          </a:p>
-        </p:txBody>
-      </p:sp>
-      <p:sp>
-        <p:nvSpPr>
-          <p:cNvPr id="4" name="TextBox 3">
-            <a:extLst>
-              <a:ext uri="{FF2B5EF4-FFF2-40B4-BE49-F238E27FC236}">
-                <a16:creationId xmlns:a16="http://schemas.microsoft.com/office/drawing/2014/main" id="{A2D65176-27C0-6A9C-1D22-589841C6C443}"/>
-              </a:ext>
-            </a:extLst>
-          </p:cNvPr>
-          <p:cNvSpPr txBox="1"/>
-          <p:nvPr/>
-        </p:nvSpPr>
-        <p:spPr>
-          <a:xfrm>
-            <a:off x="2470246" y="182880"/>
-            <a:ext cx="7492620" cy="707886"/>
-          </a:xfrm>
-          <a:prstGeom prst="rect">
-            <a:avLst/>
-          </a:prstGeom>
-          <a:noFill/>
-        </p:spPr>
-        <p:txBody>
-          <a:bodyPr wrap="square" rtlCol="0">
-            <a:spAutoFit/>
-          </a:bodyPr>
-          <a:lstStyle/>
-          <a:p>
-            <a:pPr algn="ctr"/>
-            <a:r>
-              <a:rPr lang="en-US" sz="4000" b="1" dirty="0">
-                <a:latin typeface="Cambria" panose="02040503050406030204" pitchFamily="18" charset="0"/>
-                <a:ea typeface="Cambria" panose="02040503050406030204" pitchFamily="18" charset="0"/>
-              </a:rPr>
-              <a:t>Requirements Specification</a:t>
-            </a:r>
-            <a:endParaRPr lang="en-IN" sz="4000" b="1" dirty="0">
-              <a:latin typeface="Cambria" panose="02040503050406030204" pitchFamily="18" charset="0"/>
-              <a:ea typeface="Cambria" panose="02040503050406030204" pitchFamily="18" charset="0"/>
-            </a:endParaRPr>
-          </a:p>
-        </p:txBody>
-      </p:sp>
-      <p:sp>
-        <p:nvSpPr>
-          <p:cNvPr id="5" name="Rectangle 4"/>
-          <p:cNvSpPr/>
-          <p:nvPr/>
-        </p:nvSpPr>
-        <p:spPr>
-          <a:xfrm>
-            <a:off x="678195" y="1227061"/>
-            <a:ext cx="10676741" cy="4339650"/>
-          </a:xfrm>
-          <a:prstGeom prst="rect">
-            <a:avLst/>
-          </a:prstGeom>
-        </p:spPr>
-        <p:txBody>
-          <a:bodyPr wrap="square">
-            <a:spAutoFit/>
-          </a:bodyPr>
-          <a:lstStyle/>
-          <a:p>
-            <a:pPr>
-              <a:lnSpc>
-                <a:spcPct val="150000"/>
-              </a:lnSpc>
-              <a:spcBef>
-                <a:spcPts val="0"/>
-              </a:spcBef>
-            </a:pPr>
-            <a:r>
-              <a:rPr lang="en-US" sz="2400" b="1" dirty="0">
-                <a:latin typeface="Cambria" panose="02040503050406030204" pitchFamily="18" charset="0"/>
-                <a:ea typeface="Cambria" panose="02040503050406030204" pitchFamily="18" charset="0"/>
-              </a:rPr>
-              <a:t>Hardware Requirements</a:t>
-            </a:r>
-          </a:p>
-          <a:p>
-            <a:pPr>
-              <a:lnSpc>
-                <a:spcPct val="150000"/>
-              </a:lnSpc>
-            </a:pPr>
-            <a:r>
-              <a:rPr lang="en-IN" sz="2000" b="1" dirty="0">
-                <a:latin typeface="Cambria" panose="02040503050406030204" pitchFamily="18" charset="0"/>
-                <a:ea typeface="Cambria" panose="02040503050406030204" pitchFamily="18" charset="0"/>
-              </a:rPr>
-              <a:t>Minimum Hardware</a:t>
-            </a:r>
-          </a:p>
-          <a:p>
-            <a:pPr marL="285750" indent="-285750">
-              <a:lnSpc>
-                <a:spcPct val="150000"/>
-              </a:lnSpc>
-              <a:buFont typeface="Arial" panose="020B0604020202020204" pitchFamily="34" charset="0"/>
-              <a:buChar char="•"/>
-            </a:pPr>
-            <a:r>
-              <a:rPr lang="en-IN" dirty="0">
-                <a:latin typeface="Cambria" panose="02040503050406030204" pitchFamily="18" charset="0"/>
-                <a:ea typeface="Cambria" panose="02040503050406030204" pitchFamily="18" charset="0"/>
-              </a:rPr>
-              <a:t>Processor: Intel i5 / AMD </a:t>
-            </a:r>
-            <a:r>
-              <a:rPr lang="en-IN" dirty="0" err="1">
-                <a:latin typeface="Cambria" panose="02040503050406030204" pitchFamily="18" charset="0"/>
-                <a:ea typeface="Cambria" panose="02040503050406030204" pitchFamily="18" charset="0"/>
-              </a:rPr>
-              <a:t>Ryzen</a:t>
-            </a:r>
-            <a:r>
-              <a:rPr lang="en-IN" dirty="0">
-                <a:latin typeface="Cambria" panose="02040503050406030204" pitchFamily="18" charset="0"/>
-                <a:ea typeface="Cambria" panose="02040503050406030204" pitchFamily="18" charset="0"/>
-              </a:rPr>
-              <a:t> 5</a:t>
-            </a:r>
-          </a:p>
-          <a:p>
-            <a:pPr marL="285750" indent="-285750">
-              <a:buFont typeface="Arial" panose="020B0604020202020204" pitchFamily="34" charset="0"/>
-              <a:buChar char="•"/>
-            </a:pPr>
-            <a:r>
-              <a:rPr lang="en-IN" dirty="0">
-                <a:latin typeface="Cambria" panose="02040503050406030204" pitchFamily="18" charset="0"/>
-                <a:ea typeface="Cambria" panose="02040503050406030204" pitchFamily="18" charset="0"/>
-              </a:rPr>
-              <a:t>RAM: 8 GB</a:t>
-            </a:r>
-          </a:p>
-          <a:p>
-            <a:pPr marL="285750" indent="-285750">
-              <a:buFont typeface="Arial" panose="020B0604020202020204" pitchFamily="34" charset="0"/>
-              <a:buChar char="•"/>
-            </a:pPr>
-            <a:r>
-              <a:rPr lang="en-IN" dirty="0">
-                <a:latin typeface="Cambria" panose="02040503050406030204" pitchFamily="18" charset="0"/>
-                <a:ea typeface="Cambria" panose="02040503050406030204" pitchFamily="18" charset="0"/>
-              </a:rPr>
-              <a:t>Storage: 256 GB SSD</a:t>
-            </a:r>
-          </a:p>
-          <a:p>
-            <a:pPr marL="285750" indent="-285750">
-              <a:buFont typeface="Arial" panose="020B0604020202020204" pitchFamily="34" charset="0"/>
-              <a:buChar char="•"/>
-            </a:pPr>
-            <a:r>
-              <a:rPr lang="en-IN" dirty="0">
-                <a:latin typeface="Cambria" panose="02040503050406030204" pitchFamily="18" charset="0"/>
-                <a:ea typeface="Cambria" panose="02040503050406030204" pitchFamily="18" charset="0"/>
-              </a:rPr>
-              <a:t>Internet connection (for GitHub, updates, plugins)</a:t>
-            </a:r>
-          </a:p>
-          <a:p>
-            <a:endParaRPr lang="en-IN" dirty="0">
-              <a:latin typeface="Cambria" panose="02040503050406030204" pitchFamily="18" charset="0"/>
-              <a:ea typeface="Cambria" panose="02040503050406030204" pitchFamily="18" charset="0"/>
-            </a:endParaRPr>
-          </a:p>
-          <a:p>
-            <a:pPr>
-              <a:lnSpc>
-                <a:spcPct val="150000"/>
-              </a:lnSpc>
-            </a:pPr>
-            <a:r>
-              <a:rPr lang="en-IN" sz="2000" b="1" dirty="0">
-                <a:latin typeface="Cambria" panose="02040503050406030204" pitchFamily="18" charset="0"/>
-                <a:ea typeface="Cambria" panose="02040503050406030204" pitchFamily="18" charset="0"/>
-              </a:rPr>
-              <a:t>Recommended Hardware</a:t>
-            </a:r>
-          </a:p>
-          <a:p>
-            <a:pPr marL="285750" indent="-285750">
-              <a:lnSpc>
-                <a:spcPct val="150000"/>
-              </a:lnSpc>
-              <a:buFont typeface="Arial" panose="020B0604020202020204" pitchFamily="34" charset="0"/>
-              <a:buChar char="•"/>
-            </a:pPr>
-            <a:r>
-              <a:rPr lang="en-IN" dirty="0">
-                <a:latin typeface="Cambria" panose="02040503050406030204" pitchFamily="18" charset="0"/>
-                <a:ea typeface="Cambria" panose="02040503050406030204" pitchFamily="18" charset="0"/>
-              </a:rPr>
-              <a:t>Processor: Intel i7 / AMD </a:t>
-            </a:r>
-            <a:r>
-              <a:rPr lang="en-IN" dirty="0" err="1">
-                <a:latin typeface="Cambria" panose="02040503050406030204" pitchFamily="18" charset="0"/>
-                <a:ea typeface="Cambria" panose="02040503050406030204" pitchFamily="18" charset="0"/>
-              </a:rPr>
-              <a:t>Ryzen</a:t>
-            </a:r>
-            <a:r>
-              <a:rPr lang="en-IN" dirty="0">
-                <a:latin typeface="Cambria" panose="02040503050406030204" pitchFamily="18" charset="0"/>
-                <a:ea typeface="Cambria" panose="02040503050406030204" pitchFamily="18" charset="0"/>
-              </a:rPr>
-              <a:t> 7</a:t>
-            </a:r>
-          </a:p>
-          <a:p>
-            <a:pPr marL="285750" indent="-285750">
-              <a:buFont typeface="Arial" panose="020B0604020202020204" pitchFamily="34" charset="0"/>
-              <a:buChar char="•"/>
-            </a:pPr>
-            <a:r>
-              <a:rPr lang="en-IN" dirty="0">
-                <a:latin typeface="Cambria" panose="02040503050406030204" pitchFamily="18" charset="0"/>
-                <a:ea typeface="Cambria" panose="02040503050406030204" pitchFamily="18" charset="0"/>
-              </a:rPr>
-              <a:t>RAM: 16 GB</a:t>
-            </a:r>
-          </a:p>
-          <a:p>
-            <a:pPr marL="285750" indent="-285750">
-              <a:buFont typeface="Arial" panose="020B0604020202020204" pitchFamily="34" charset="0"/>
-              <a:buChar char="•"/>
-            </a:pPr>
-            <a:r>
-              <a:rPr lang="en-IN" dirty="0">
-                <a:latin typeface="Cambria" panose="02040503050406030204" pitchFamily="18" charset="0"/>
-                <a:ea typeface="Cambria" panose="02040503050406030204" pitchFamily="18" charset="0"/>
-              </a:rPr>
-              <a:t>Storage: 512 GB SSD</a:t>
-            </a:r>
-          </a:p>
-          <a:p>
-            <a:pPr marL="285750" indent="-285750">
-              <a:buFont typeface="Arial" panose="020B0604020202020204" pitchFamily="34" charset="0"/>
-              <a:buChar char="•"/>
-            </a:pPr>
-            <a:r>
-              <a:rPr lang="en-IN" dirty="0">
-                <a:latin typeface="Cambria" panose="02040503050406030204" pitchFamily="18" charset="0"/>
-                <a:ea typeface="Cambria" panose="02040503050406030204" pitchFamily="18" charset="0"/>
-              </a:rPr>
-              <a:t>Virtualization support enabled (for Docker &amp; Jenkins)</a:t>
-            </a:r>
-            <a:endParaRPr lang="en-US" sz="2400" dirty="0">
-              <a:latin typeface="Cambria" panose="02040503050406030204" pitchFamily="18" charset="0"/>
-              <a:ea typeface="Cambria" panose="02040503050406030204" pitchFamily="18" charset="0"/>
-            </a:endParaRPr>
-          </a:p>
-        </p:txBody>
-      </p:sp>
-    </p:spTree>
-    <p:extLst>
-      <p:ext uri="{BB962C8B-B14F-4D97-AF65-F5344CB8AC3E}">
-        <p14:creationId xmlns:p14="http://schemas.microsoft.com/office/powerpoint/2010/main" val="3384435853"/>
       </p:ext>
     </p:extLst>
   </p:cSld>
